--- a/slides/CSC336-Lecture-32-Domain-DNS-and-Deployment.pptx
+++ b/slides/CSC336-Lecture-32-Domain-DNS-and-Deployment.pptx
@@ -3459,79 +3459,44 @@
       </p:sp>
       <p:sp>
         <p:nvSpPr>
-          <p:cNvPr id="6" name="Text 4"/>
-          <p:cNvSpPr txBox="1"/>
-          <p:nvPr/>
-        </p:nvSpPr>
-        <p:spPr>
-          <a:xfrm>
-            <a:off x="640080" y="6446520"/>
-            <a:ext cx="8686800" cy="292608"/>
-          </a:xfrm>
-          <a:prstGeom prst="rect">
-            <a:avLst/>
-          </a:prstGeom>
-          <a:noFill/>
-          <a:ln/>
-        </p:spPr>
-        <p:txBody>
-          <a:bodyPr wrap="square" lIns="0" tIns="0" rIns="0" bIns="0" rtlCol="0" anchor="ctr"/>
-          <a:lstStyle/>
-          <a:p>
-            <a:pPr algn="l" indent="0" marL="0">
-              <a:buNone/>
-            </a:pPr>
-            <a:r>
-              <a:rPr lang="en-US" sz="900" dirty="0">
-                <a:solidFill>
-                  <a:srgbClr val="9AA3D8"/>
-                </a:solidFill>
-                <a:latin typeface="Calibri" pitchFamily="34" charset="0"/>
-                <a:ea typeface="Calibri" pitchFamily="34" charset="-122"/>
-                <a:cs typeface="Calibri" pitchFamily="34" charset="-120"/>
-              </a:rPr>
-              <a:t>Usman Akram  •  COMSATS University Islamabad</a:t>
-            </a:r>
-            <a:endParaRPr lang="en-US" sz="900" dirty="0"/>
-          </a:p>
-        </p:txBody>
-      </p:sp>
-      <p:sp>
-        <p:nvSpPr>
-          <p:cNvPr id="7" name="Text 5"/>
-          <p:cNvSpPr txBox="1"/>
-          <p:nvPr/>
-        </p:nvSpPr>
-        <p:spPr>
-          <a:xfrm>
-            <a:off x="11155680" y="6446520"/>
-            <a:ext cx="457200" cy="292608"/>
-          </a:xfrm>
-          <a:prstGeom prst="rect">
-            <a:avLst/>
-          </a:prstGeom>
-          <a:noFill/>
-          <a:ln/>
-        </p:spPr>
-        <p:txBody>
-          <a:bodyPr wrap="square" lIns="0" tIns="0" rIns="0" bIns="0" rtlCol="0" anchor="ctr"/>
-          <a:lstStyle/>
-          <a:p>
-            <a:pPr algn="r" indent="0" marL="0">
-              <a:buNone/>
-            </a:pPr>
-            <a:r>
-              <a:rPr lang="en-US" sz="900" dirty="0">
-                <a:solidFill>
-                  <a:srgbClr val="9AA3D8"/>
-                </a:solidFill>
-                <a:latin typeface="Calibri" pitchFamily="34" charset="0"/>
-                <a:ea typeface="Calibri" pitchFamily="34" charset="-122"/>
-                <a:cs typeface="Calibri" pitchFamily="34" charset="-120"/>
-              </a:rPr>
-              <a:t>1</a:t>
-            </a:r>
-            <a:endParaRPr lang="en-US" sz="900" dirty="0"/>
+          <p:cNvPr id="8" name="cuinotes-footer-mark"/>
+          <p:cNvSpPr txBox="1"/>
+          <p:nvPr/>
+        </p:nvSpPr>
+        <p:spPr>
+          <a:xfrm>
+            <a:off x="9951720" y="6455664"/>
+            <a:ext cx="2011680" cy="292608"/>
+          </a:xfrm>
+          <a:prstGeom prst="rect">
+            <a:avLst/>
+          </a:prstGeom>
+          <a:noFill/>
+        </p:spPr>
+        <p:txBody>
+          <a:bodyPr wrap="none" lIns="0" rIns="0" tIns="0" bIns="0">
+            <a:spAutoFit/>
+          </a:bodyPr>
+          <a:lstStyle/>
+          <a:p>
+            <a:pPr algn="r"/>
+            <a:r>
+              <a:rPr sz="1000">
+                <a:solidFill>
+                  <a:srgbClr val="8A939B"/>
+                </a:solidFill>
+                <a:hlinkClick r:id="rId3"/>
+              </a:rPr>
+              <a:t>cuinotes.com</a:t>
+            </a:r>
+            <a:r>
+              <a:rPr sz="1000">
+                <a:solidFill>
+                  <a:srgbClr val="8A939B"/>
+                </a:solidFill>
+              </a:rPr>
+              <a:t>  ·  1</a:t>
+            </a:r>
           </a:p>
         </p:txBody>
       </p:sp>
@@ -3664,6 +3629,10 @@
           </a:solidFill>
           <a:ln/>
         </p:spPr>
+        <p:txBody>
+          <a:bodyPr/>
+          <a:p/>
+        </p:txBody>
       </p:sp>
       <p:sp>
         <p:nvSpPr>
@@ -3762,6 +3731,10 @@
           </a:solidFill>
           <a:ln/>
         </p:spPr>
+        <p:txBody>
+          <a:bodyPr/>
+          <a:p/>
+        </p:txBody>
       </p:sp>
       <p:sp>
         <p:nvSpPr>
@@ -3843,79 +3816,44 @@
       </p:sp>
       <p:sp>
         <p:nvSpPr>
-          <p:cNvPr id="10" name="Text 8"/>
-          <p:cNvSpPr txBox="1"/>
-          <p:nvPr/>
-        </p:nvSpPr>
-        <p:spPr>
-          <a:xfrm>
-            <a:off x="640080" y="6446520"/>
-            <a:ext cx="8686800" cy="292608"/>
-          </a:xfrm>
-          <a:prstGeom prst="rect">
-            <a:avLst/>
-          </a:prstGeom>
-          <a:noFill/>
-          <a:ln/>
-        </p:spPr>
-        <p:txBody>
-          <a:bodyPr wrap="square" lIns="0" tIns="0" rIns="0" bIns="0" rtlCol="0" anchor="ctr"/>
-          <a:lstStyle/>
-          <a:p>
-            <a:pPr algn="l" indent="0" marL="0">
-              <a:buNone/>
-            </a:pPr>
-            <a:r>
-              <a:rPr lang="en-US" sz="900" dirty="0">
-                <a:solidFill>
-                  <a:srgbClr val="5D5D72"/>
-                </a:solidFill>
-                <a:latin typeface="Calibri" pitchFamily="34" charset="0"/>
-                <a:ea typeface="Calibri" pitchFamily="34" charset="-122"/>
-                <a:cs typeface="Calibri" pitchFamily="34" charset="-120"/>
-              </a:rPr>
-              <a:t>Usman Akram  •  COMSATS University Islamabad</a:t>
-            </a:r>
-            <a:endParaRPr lang="en-US" sz="900" dirty="0"/>
-          </a:p>
-        </p:txBody>
-      </p:sp>
-      <p:sp>
-        <p:nvSpPr>
-          <p:cNvPr id="11" name="Text 9"/>
-          <p:cNvSpPr txBox="1"/>
-          <p:nvPr/>
-        </p:nvSpPr>
-        <p:spPr>
-          <a:xfrm>
-            <a:off x="11155680" y="6446520"/>
-            <a:ext cx="457200" cy="292608"/>
-          </a:xfrm>
-          <a:prstGeom prst="rect">
-            <a:avLst/>
-          </a:prstGeom>
-          <a:noFill/>
-          <a:ln/>
-        </p:spPr>
-        <p:txBody>
-          <a:bodyPr wrap="square" lIns="0" tIns="0" rIns="0" bIns="0" rtlCol="0" anchor="ctr"/>
-          <a:lstStyle/>
-          <a:p>
-            <a:pPr algn="r" indent="0" marL="0">
-              <a:buNone/>
-            </a:pPr>
-            <a:r>
-              <a:rPr lang="en-US" sz="900" dirty="0">
-                <a:solidFill>
-                  <a:srgbClr val="5D5D72"/>
-                </a:solidFill>
-                <a:latin typeface="Calibri" pitchFamily="34" charset="0"/>
-                <a:ea typeface="Calibri" pitchFamily="34" charset="-122"/>
-                <a:cs typeface="Calibri" pitchFamily="34" charset="-120"/>
-              </a:rPr>
-              <a:t>10</a:t>
-            </a:r>
-            <a:endParaRPr lang="en-US" sz="900" dirty="0"/>
+          <p:cNvPr id="12" name="cuinotes-footer-mark"/>
+          <p:cNvSpPr txBox="1"/>
+          <p:nvPr/>
+        </p:nvSpPr>
+        <p:spPr>
+          <a:xfrm>
+            <a:off x="9951720" y="6455664"/>
+            <a:ext cx="2011680" cy="292608"/>
+          </a:xfrm>
+          <a:prstGeom prst="rect">
+            <a:avLst/>
+          </a:prstGeom>
+          <a:noFill/>
+        </p:spPr>
+        <p:txBody>
+          <a:bodyPr wrap="none" lIns="0" rIns="0" tIns="0" bIns="0">
+            <a:spAutoFit/>
+          </a:bodyPr>
+          <a:lstStyle/>
+          <a:p>
+            <a:pPr algn="r"/>
+            <a:r>
+              <a:rPr sz="1000">
+                <a:solidFill>
+                  <a:srgbClr val="8A939B"/>
+                </a:solidFill>
+                <a:hlinkClick r:id="rId3"/>
+              </a:rPr>
+              <a:t>cuinotes.com</a:t>
+            </a:r>
+            <a:r>
+              <a:rPr sz="1000">
+                <a:solidFill>
+                  <a:srgbClr val="8A939B"/>
+                </a:solidFill>
+              </a:rPr>
+              <a:t>  ·  10</a:t>
+            </a:r>
           </a:p>
         </p:txBody>
       </p:sp>
@@ -4050,6 +3988,10 @@
           </a:solidFill>
           <a:ln/>
         </p:spPr>
+        <p:txBody>
+          <a:bodyPr/>
+          <a:p/>
+        </p:txBody>
       </p:sp>
       <p:sp>
         <p:nvSpPr>
@@ -4095,79 +4037,44 @@
       </p:sp>
       <p:sp>
         <p:nvSpPr>
-          <p:cNvPr id="6" name="Text 4"/>
-          <p:cNvSpPr txBox="1"/>
-          <p:nvPr/>
-        </p:nvSpPr>
-        <p:spPr>
-          <a:xfrm>
-            <a:off x="640080" y="6446520"/>
-            <a:ext cx="8686800" cy="292608"/>
-          </a:xfrm>
-          <a:prstGeom prst="rect">
-            <a:avLst/>
-          </a:prstGeom>
-          <a:noFill/>
-          <a:ln/>
-        </p:spPr>
-        <p:txBody>
-          <a:bodyPr wrap="square" lIns="0" tIns="0" rIns="0" bIns="0" rtlCol="0" anchor="ctr"/>
-          <a:lstStyle/>
-          <a:p>
-            <a:pPr algn="l" indent="0" marL="0">
-              <a:buNone/>
-            </a:pPr>
-            <a:r>
-              <a:rPr lang="en-US" sz="900" dirty="0">
-                <a:solidFill>
-                  <a:srgbClr val="5D5D72"/>
-                </a:solidFill>
-                <a:latin typeface="Calibri" pitchFamily="34" charset="0"/>
-                <a:ea typeface="Calibri" pitchFamily="34" charset="-122"/>
-                <a:cs typeface="Calibri" pitchFamily="34" charset="-120"/>
-              </a:rPr>
-              <a:t>Usman Akram  •  COMSATS University Islamabad</a:t>
-            </a:r>
-            <a:endParaRPr lang="en-US" sz="900" dirty="0"/>
-          </a:p>
-        </p:txBody>
-      </p:sp>
-      <p:sp>
-        <p:nvSpPr>
-          <p:cNvPr id="7" name="Text 5"/>
-          <p:cNvSpPr txBox="1"/>
-          <p:nvPr/>
-        </p:nvSpPr>
-        <p:spPr>
-          <a:xfrm>
-            <a:off x="11155680" y="6446520"/>
-            <a:ext cx="457200" cy="292608"/>
-          </a:xfrm>
-          <a:prstGeom prst="rect">
-            <a:avLst/>
-          </a:prstGeom>
-          <a:noFill/>
-          <a:ln/>
-        </p:spPr>
-        <p:txBody>
-          <a:bodyPr wrap="square" lIns="0" tIns="0" rIns="0" bIns="0" rtlCol="0" anchor="ctr"/>
-          <a:lstStyle/>
-          <a:p>
-            <a:pPr algn="r" indent="0" marL="0">
-              <a:buNone/>
-            </a:pPr>
-            <a:r>
-              <a:rPr lang="en-US" sz="900" dirty="0">
-                <a:solidFill>
-                  <a:srgbClr val="5D5D72"/>
-                </a:solidFill>
-                <a:latin typeface="Calibri" pitchFamily="34" charset="0"/>
-                <a:ea typeface="Calibri" pitchFamily="34" charset="-122"/>
-                <a:cs typeface="Calibri" pitchFamily="34" charset="-120"/>
-              </a:rPr>
-              <a:t>11</a:t>
-            </a:r>
-            <a:endParaRPr lang="en-US" sz="900" dirty="0"/>
+          <p:cNvPr id="8" name="cuinotes-footer-mark"/>
+          <p:cNvSpPr txBox="1"/>
+          <p:nvPr/>
+        </p:nvSpPr>
+        <p:spPr>
+          <a:xfrm>
+            <a:off x="9951720" y="6455664"/>
+            <a:ext cx="2011680" cy="292608"/>
+          </a:xfrm>
+          <a:prstGeom prst="rect">
+            <a:avLst/>
+          </a:prstGeom>
+          <a:noFill/>
+        </p:spPr>
+        <p:txBody>
+          <a:bodyPr wrap="none" lIns="0" rIns="0" tIns="0" bIns="0">
+            <a:spAutoFit/>
+          </a:bodyPr>
+          <a:lstStyle/>
+          <a:p>
+            <a:pPr algn="r"/>
+            <a:r>
+              <a:rPr sz="1000">
+                <a:solidFill>
+                  <a:srgbClr val="8A939B"/>
+                </a:solidFill>
+                <a:hlinkClick r:id="rId3"/>
+              </a:rPr>
+              <a:t>cuinotes.com</a:t>
+            </a:r>
+            <a:r>
+              <a:rPr sz="1000">
+                <a:solidFill>
+                  <a:srgbClr val="8A939B"/>
+                </a:solidFill>
+              </a:rPr>
+              <a:t>  ·  11</a:t>
+            </a:r>
           </a:p>
         </p:txBody>
       </p:sp>
@@ -4727,79 +4634,44 @@
       </p:graphicFrame>
       <p:sp>
         <p:nvSpPr>
-          <p:cNvPr id="5" name="Text 2"/>
-          <p:cNvSpPr txBox="1"/>
-          <p:nvPr/>
-        </p:nvSpPr>
-        <p:spPr>
-          <a:xfrm>
-            <a:off x="640080" y="6446520"/>
-            <a:ext cx="8686800" cy="292608"/>
-          </a:xfrm>
-          <a:prstGeom prst="rect">
-            <a:avLst/>
-          </a:prstGeom>
-          <a:noFill/>
-          <a:ln/>
-        </p:spPr>
-        <p:txBody>
-          <a:bodyPr wrap="square" lIns="0" tIns="0" rIns="0" bIns="0" rtlCol="0" anchor="ctr"/>
-          <a:lstStyle/>
-          <a:p>
-            <a:pPr algn="l" indent="0" marL="0">
-              <a:buNone/>
-            </a:pPr>
-            <a:r>
-              <a:rPr lang="en-US" sz="900" dirty="0">
-                <a:solidFill>
-                  <a:srgbClr val="5D5D72"/>
-                </a:solidFill>
-                <a:latin typeface="Calibri" pitchFamily="34" charset="0"/>
-                <a:ea typeface="Calibri" pitchFamily="34" charset="-122"/>
-                <a:cs typeface="Calibri" pitchFamily="34" charset="-120"/>
-              </a:rPr>
-              <a:t>Usman Akram  •  COMSATS University Islamabad</a:t>
-            </a:r>
-            <a:endParaRPr lang="en-US" sz="900" dirty="0"/>
-          </a:p>
-        </p:txBody>
-      </p:sp>
-      <p:sp>
-        <p:nvSpPr>
-          <p:cNvPr id="6" name="Text 3"/>
-          <p:cNvSpPr txBox="1"/>
-          <p:nvPr/>
-        </p:nvSpPr>
-        <p:spPr>
-          <a:xfrm>
-            <a:off x="11155680" y="6446520"/>
-            <a:ext cx="457200" cy="292608"/>
-          </a:xfrm>
-          <a:prstGeom prst="rect">
-            <a:avLst/>
-          </a:prstGeom>
-          <a:noFill/>
-          <a:ln/>
-        </p:spPr>
-        <p:txBody>
-          <a:bodyPr wrap="square" lIns="0" tIns="0" rIns="0" bIns="0" rtlCol="0" anchor="ctr"/>
-          <a:lstStyle/>
-          <a:p>
-            <a:pPr algn="r" indent="0" marL="0">
-              <a:buNone/>
-            </a:pPr>
-            <a:r>
-              <a:rPr lang="en-US" sz="900" dirty="0">
-                <a:solidFill>
-                  <a:srgbClr val="5D5D72"/>
-                </a:solidFill>
-                <a:latin typeface="Calibri" pitchFamily="34" charset="0"/>
-                <a:ea typeface="Calibri" pitchFamily="34" charset="-122"/>
-                <a:cs typeface="Calibri" pitchFamily="34" charset="-120"/>
-              </a:rPr>
-              <a:t>12</a:t>
-            </a:r>
-            <a:endParaRPr lang="en-US" sz="900" dirty="0"/>
+          <p:cNvPr id="14" name="cuinotes-footer-mark"/>
+          <p:cNvSpPr txBox="1"/>
+          <p:nvPr/>
+        </p:nvSpPr>
+        <p:spPr>
+          <a:xfrm>
+            <a:off x="9951720" y="6455664"/>
+            <a:ext cx="2011680" cy="292608"/>
+          </a:xfrm>
+          <a:prstGeom prst="rect">
+            <a:avLst/>
+          </a:prstGeom>
+          <a:noFill/>
+        </p:spPr>
+        <p:txBody>
+          <a:bodyPr wrap="none" lIns="0" rIns="0" tIns="0" bIns="0">
+            <a:spAutoFit/>
+          </a:bodyPr>
+          <a:lstStyle/>
+          <a:p>
+            <a:pPr algn="r"/>
+            <a:r>
+              <a:rPr sz="1000">
+                <a:solidFill>
+                  <a:srgbClr val="8A939B"/>
+                </a:solidFill>
+                <a:hlinkClick r:id="rId3"/>
+              </a:rPr>
+              <a:t>cuinotes.com</a:t>
+            </a:r>
+            <a:r>
+              <a:rPr sz="1000">
+                <a:solidFill>
+                  <a:srgbClr val="8A939B"/>
+                </a:solidFill>
+              </a:rPr>
+              <a:t>  ·  12</a:t>
+            </a:r>
           </a:p>
         </p:txBody>
       </p:sp>
@@ -4939,6 +4811,10 @@
             <a:prstDash val="solid"/>
           </a:ln>
         </p:spPr>
+        <p:txBody>
+          <a:bodyPr/>
+          <a:p/>
+        </p:txBody>
       </p:sp>
       <p:sp>
         <p:nvSpPr>
@@ -5020,79 +4896,44 @@
       </p:sp>
       <p:sp>
         <p:nvSpPr>
-          <p:cNvPr id="7" name="Text 5"/>
-          <p:cNvSpPr txBox="1"/>
-          <p:nvPr/>
-        </p:nvSpPr>
-        <p:spPr>
-          <a:xfrm>
-            <a:off x="640080" y="6446520"/>
-            <a:ext cx="8686800" cy="292608"/>
-          </a:xfrm>
-          <a:prstGeom prst="rect">
-            <a:avLst/>
-          </a:prstGeom>
-          <a:noFill/>
-          <a:ln/>
-        </p:spPr>
-        <p:txBody>
-          <a:bodyPr wrap="square" lIns="0" tIns="0" rIns="0" bIns="0" rtlCol="0" anchor="ctr"/>
-          <a:lstStyle/>
-          <a:p>
-            <a:pPr algn="l" indent="0" marL="0">
-              <a:buNone/>
-            </a:pPr>
-            <a:r>
-              <a:rPr lang="en-US" sz="900" dirty="0">
-                <a:solidFill>
-                  <a:srgbClr val="5D5D72"/>
-                </a:solidFill>
-                <a:latin typeface="Calibri" pitchFamily="34" charset="0"/>
-                <a:ea typeface="Calibri" pitchFamily="34" charset="-122"/>
-                <a:cs typeface="Calibri" pitchFamily="34" charset="-120"/>
-              </a:rPr>
-              <a:t>Usman Akram  •  COMSATS University Islamabad</a:t>
-            </a:r>
-            <a:endParaRPr lang="en-US" sz="900" dirty="0"/>
-          </a:p>
-        </p:txBody>
-      </p:sp>
-      <p:sp>
-        <p:nvSpPr>
-          <p:cNvPr id="8" name="Text 6"/>
-          <p:cNvSpPr txBox="1"/>
-          <p:nvPr/>
-        </p:nvSpPr>
-        <p:spPr>
-          <a:xfrm>
-            <a:off x="11155680" y="6446520"/>
-            <a:ext cx="457200" cy="292608"/>
-          </a:xfrm>
-          <a:prstGeom prst="rect">
-            <a:avLst/>
-          </a:prstGeom>
-          <a:noFill/>
-          <a:ln/>
-        </p:spPr>
-        <p:txBody>
-          <a:bodyPr wrap="square" lIns="0" tIns="0" rIns="0" bIns="0" rtlCol="0" anchor="ctr"/>
-          <a:lstStyle/>
-          <a:p>
-            <a:pPr algn="r" indent="0" marL="0">
-              <a:buNone/>
-            </a:pPr>
-            <a:r>
-              <a:rPr lang="en-US" sz="900" dirty="0">
-                <a:solidFill>
-                  <a:srgbClr val="5D5D72"/>
-                </a:solidFill>
-                <a:latin typeface="Calibri" pitchFamily="34" charset="0"/>
-                <a:ea typeface="Calibri" pitchFamily="34" charset="-122"/>
-                <a:cs typeface="Calibri" pitchFamily="34" charset="-120"/>
-              </a:rPr>
-              <a:t>13</a:t>
-            </a:r>
-            <a:endParaRPr lang="en-US" sz="900" dirty="0"/>
+          <p:cNvPr id="9" name="cuinotes-footer-mark"/>
+          <p:cNvSpPr txBox="1"/>
+          <p:nvPr/>
+        </p:nvSpPr>
+        <p:spPr>
+          <a:xfrm>
+            <a:off x="9951720" y="6455664"/>
+            <a:ext cx="2011680" cy="292608"/>
+          </a:xfrm>
+          <a:prstGeom prst="rect">
+            <a:avLst/>
+          </a:prstGeom>
+          <a:noFill/>
+        </p:spPr>
+        <p:txBody>
+          <a:bodyPr wrap="none" lIns="0" rIns="0" tIns="0" bIns="0">
+            <a:spAutoFit/>
+          </a:bodyPr>
+          <a:lstStyle/>
+          <a:p>
+            <a:pPr algn="r"/>
+            <a:r>
+              <a:rPr sz="1000">
+                <a:solidFill>
+                  <a:srgbClr val="8A939B"/>
+                </a:solidFill>
+                <a:hlinkClick r:id="rId3"/>
+              </a:rPr>
+              <a:t>cuinotes.com</a:t>
+            </a:r>
+            <a:r>
+              <a:rPr sz="1000">
+                <a:solidFill>
+                  <a:srgbClr val="8A939B"/>
+                </a:solidFill>
+              </a:rPr>
+              <a:t>  ·  13</a:t>
+            </a:r>
           </a:p>
         </p:txBody>
       </p:sp>
@@ -5227,6 +5068,10 @@
           </a:solidFill>
           <a:ln/>
         </p:spPr>
+        <p:txBody>
+          <a:bodyPr/>
+          <a:p/>
+        </p:txBody>
       </p:sp>
       <p:sp>
         <p:nvSpPr>
@@ -5324,6 +5169,10 @@
             <a:tailEnd type="triangle"/>
           </a:ln>
         </p:spPr>
+        <p:txBody>
+          <a:bodyPr/>
+          <a:p/>
+        </p:txBody>
       </p:sp>
       <p:sp>
         <p:nvSpPr>
@@ -5346,6 +5195,10 @@
           </a:solidFill>
           <a:ln/>
         </p:spPr>
+        <p:txBody>
+          <a:bodyPr/>
+          <a:p/>
+        </p:txBody>
       </p:sp>
       <p:sp>
         <p:nvSpPr>
@@ -5443,6 +5296,10 @@
             <a:tailEnd type="triangle"/>
           </a:ln>
         </p:spPr>
+        <p:txBody>
+          <a:bodyPr/>
+          <a:p/>
+        </p:txBody>
       </p:sp>
       <p:sp>
         <p:nvSpPr>
@@ -5465,6 +5322,10 @@
           </a:solidFill>
           <a:ln/>
         </p:spPr>
+        <p:txBody>
+          <a:bodyPr/>
+          <a:p/>
+        </p:txBody>
       </p:sp>
       <p:sp>
         <p:nvSpPr>
@@ -5562,6 +5423,10 @@
             <a:tailEnd type="triangle"/>
           </a:ln>
         </p:spPr>
+        <p:txBody>
+          <a:bodyPr/>
+          <a:p/>
+        </p:txBody>
       </p:sp>
       <p:sp>
         <p:nvSpPr>
@@ -5584,6 +5449,10 @@
           </a:solidFill>
           <a:ln/>
         </p:spPr>
+        <p:txBody>
+          <a:bodyPr/>
+          <a:p/>
+        </p:txBody>
       </p:sp>
       <p:sp>
         <p:nvSpPr>
@@ -5660,79 +5529,44 @@
       </p:sp>
       <p:sp>
         <p:nvSpPr>
-          <p:cNvPr id="15" name="Text 13"/>
-          <p:cNvSpPr txBox="1"/>
-          <p:nvPr/>
-        </p:nvSpPr>
-        <p:spPr>
-          <a:xfrm>
-            <a:off x="640080" y="6446520"/>
-            <a:ext cx="8686800" cy="292608"/>
-          </a:xfrm>
-          <a:prstGeom prst="rect">
-            <a:avLst/>
-          </a:prstGeom>
-          <a:noFill/>
-          <a:ln/>
-        </p:spPr>
-        <p:txBody>
-          <a:bodyPr wrap="square" lIns="0" tIns="0" rIns="0" bIns="0" rtlCol="0" anchor="ctr"/>
-          <a:lstStyle/>
-          <a:p>
-            <a:pPr algn="l" indent="0" marL="0">
-              <a:buNone/>
-            </a:pPr>
-            <a:r>
-              <a:rPr lang="en-US" sz="900" dirty="0">
-                <a:solidFill>
-                  <a:srgbClr val="5D5D72"/>
-                </a:solidFill>
-                <a:latin typeface="Calibri" pitchFamily="34" charset="0"/>
-                <a:ea typeface="Calibri" pitchFamily="34" charset="-122"/>
-                <a:cs typeface="Calibri" pitchFamily="34" charset="-120"/>
-              </a:rPr>
-              <a:t>Usman Akram  •  COMSATS University Islamabad</a:t>
-            </a:r>
-            <a:endParaRPr lang="en-US" sz="900" dirty="0"/>
-          </a:p>
-        </p:txBody>
-      </p:sp>
-      <p:sp>
-        <p:nvSpPr>
-          <p:cNvPr id="16" name="Text 14"/>
-          <p:cNvSpPr txBox="1"/>
-          <p:nvPr/>
-        </p:nvSpPr>
-        <p:spPr>
-          <a:xfrm>
-            <a:off x="11155680" y="6446520"/>
-            <a:ext cx="457200" cy="292608"/>
-          </a:xfrm>
-          <a:prstGeom prst="rect">
-            <a:avLst/>
-          </a:prstGeom>
-          <a:noFill/>
-          <a:ln/>
-        </p:spPr>
-        <p:txBody>
-          <a:bodyPr wrap="square" lIns="0" tIns="0" rIns="0" bIns="0" rtlCol="0" anchor="ctr"/>
-          <a:lstStyle/>
-          <a:p>
-            <a:pPr algn="r" indent="0" marL="0">
-              <a:buNone/>
-            </a:pPr>
-            <a:r>
-              <a:rPr lang="en-US" sz="900" dirty="0">
-                <a:solidFill>
-                  <a:srgbClr val="5D5D72"/>
-                </a:solidFill>
-                <a:latin typeface="Calibri" pitchFamily="34" charset="0"/>
-                <a:ea typeface="Calibri" pitchFamily="34" charset="-122"/>
-                <a:cs typeface="Calibri" pitchFamily="34" charset="-120"/>
-              </a:rPr>
-              <a:t>14</a:t>
-            </a:r>
-            <a:endParaRPr lang="en-US" sz="900" dirty="0"/>
+          <p:cNvPr id="17" name="cuinotes-footer-mark"/>
+          <p:cNvSpPr txBox="1"/>
+          <p:nvPr/>
+        </p:nvSpPr>
+        <p:spPr>
+          <a:xfrm>
+            <a:off x="9951720" y="6455664"/>
+            <a:ext cx="2011680" cy="292608"/>
+          </a:xfrm>
+          <a:prstGeom prst="rect">
+            <a:avLst/>
+          </a:prstGeom>
+          <a:noFill/>
+        </p:spPr>
+        <p:txBody>
+          <a:bodyPr wrap="none" lIns="0" rIns="0" tIns="0" bIns="0">
+            <a:spAutoFit/>
+          </a:bodyPr>
+          <a:lstStyle/>
+          <a:p>
+            <a:pPr algn="r"/>
+            <a:r>
+              <a:rPr sz="1000">
+                <a:solidFill>
+                  <a:srgbClr val="8A939B"/>
+                </a:solidFill>
+                <a:hlinkClick r:id="rId3"/>
+              </a:rPr>
+              <a:t>cuinotes.com</a:t>
+            </a:r>
+            <a:r>
+              <a:rPr sz="1000">
+                <a:solidFill>
+                  <a:srgbClr val="8A939B"/>
+                </a:solidFill>
+              </a:rPr>
+              <a:t>  ·  14</a:t>
+            </a:r>
           </a:p>
         </p:txBody>
       </p:sp>
@@ -5872,6 +5706,10 @@
             <a:prstDash val="solid"/>
           </a:ln>
         </p:spPr>
+        <p:txBody>
+          <a:bodyPr/>
+          <a:p/>
+        </p:txBody>
       </p:sp>
       <p:sp>
         <p:nvSpPr>
@@ -6023,6 +5861,10 @@
             <a:prstDash val="solid"/>
           </a:ln>
         </p:spPr>
+        <p:txBody>
+          <a:bodyPr/>
+          <a:p/>
+        </p:txBody>
       </p:sp>
       <p:sp>
         <p:nvSpPr>
@@ -6174,6 +6016,10 @@
             <a:prstDash val="solid"/>
           </a:ln>
         </p:spPr>
+        <p:txBody>
+          <a:bodyPr/>
+          <a:p/>
+        </p:txBody>
       </p:sp>
       <p:sp>
         <p:nvSpPr>
@@ -6325,6 +6171,10 @@
             <a:prstDash val="solid"/>
           </a:ln>
         </p:spPr>
+        <p:txBody>
+          <a:bodyPr/>
+          <a:p/>
+        </p:txBody>
       </p:sp>
       <p:sp>
         <p:nvSpPr>
@@ -6452,79 +6302,44 @@
       </p:sp>
       <p:sp>
         <p:nvSpPr>
-          <p:cNvPr id="16" name="Text 14"/>
-          <p:cNvSpPr txBox="1"/>
-          <p:nvPr/>
-        </p:nvSpPr>
-        <p:spPr>
-          <a:xfrm>
-            <a:off x="640080" y="6446520"/>
-            <a:ext cx="8686800" cy="292608"/>
-          </a:xfrm>
-          <a:prstGeom prst="rect">
-            <a:avLst/>
-          </a:prstGeom>
-          <a:noFill/>
-          <a:ln/>
-        </p:spPr>
-        <p:txBody>
-          <a:bodyPr wrap="square" lIns="0" tIns="0" rIns="0" bIns="0" rtlCol="0" anchor="ctr"/>
-          <a:lstStyle/>
-          <a:p>
-            <a:pPr algn="l" indent="0" marL="0">
-              <a:buNone/>
-            </a:pPr>
-            <a:r>
-              <a:rPr lang="en-US" sz="900" dirty="0">
-                <a:solidFill>
-                  <a:srgbClr val="5D5D72"/>
-                </a:solidFill>
-                <a:latin typeface="Calibri" pitchFamily="34" charset="0"/>
-                <a:ea typeface="Calibri" pitchFamily="34" charset="-122"/>
-                <a:cs typeface="Calibri" pitchFamily="34" charset="-120"/>
-              </a:rPr>
-              <a:t>Usman Akram  •  COMSATS University Islamabad</a:t>
-            </a:r>
-            <a:endParaRPr lang="en-US" sz="900" dirty="0"/>
-          </a:p>
-        </p:txBody>
-      </p:sp>
-      <p:sp>
-        <p:nvSpPr>
-          <p:cNvPr id="17" name="Text 15"/>
-          <p:cNvSpPr txBox="1"/>
-          <p:nvPr/>
-        </p:nvSpPr>
-        <p:spPr>
-          <a:xfrm>
-            <a:off x="11155680" y="6446520"/>
-            <a:ext cx="457200" cy="292608"/>
-          </a:xfrm>
-          <a:prstGeom prst="rect">
-            <a:avLst/>
-          </a:prstGeom>
-          <a:noFill/>
-          <a:ln/>
-        </p:spPr>
-        <p:txBody>
-          <a:bodyPr wrap="square" lIns="0" tIns="0" rIns="0" bIns="0" rtlCol="0" anchor="ctr"/>
-          <a:lstStyle/>
-          <a:p>
-            <a:pPr algn="r" indent="0" marL="0">
-              <a:buNone/>
-            </a:pPr>
-            <a:r>
-              <a:rPr lang="en-US" sz="900" dirty="0">
-                <a:solidFill>
-                  <a:srgbClr val="5D5D72"/>
-                </a:solidFill>
-                <a:latin typeface="Calibri" pitchFamily="34" charset="0"/>
-                <a:ea typeface="Calibri" pitchFamily="34" charset="-122"/>
-                <a:cs typeface="Calibri" pitchFamily="34" charset="-120"/>
-              </a:rPr>
-              <a:t>15</a:t>
-            </a:r>
-            <a:endParaRPr lang="en-US" sz="900" dirty="0"/>
+          <p:cNvPr id="18" name="cuinotes-footer-mark"/>
+          <p:cNvSpPr txBox="1"/>
+          <p:nvPr/>
+        </p:nvSpPr>
+        <p:spPr>
+          <a:xfrm>
+            <a:off x="9951720" y="6455664"/>
+            <a:ext cx="2011680" cy="292608"/>
+          </a:xfrm>
+          <a:prstGeom prst="rect">
+            <a:avLst/>
+          </a:prstGeom>
+          <a:noFill/>
+        </p:spPr>
+        <p:txBody>
+          <a:bodyPr wrap="none" lIns="0" rIns="0" tIns="0" bIns="0">
+            <a:spAutoFit/>
+          </a:bodyPr>
+          <a:lstStyle/>
+          <a:p>
+            <a:pPr algn="r"/>
+            <a:r>
+              <a:rPr sz="1000">
+                <a:solidFill>
+                  <a:srgbClr val="8A939B"/>
+                </a:solidFill>
+                <a:hlinkClick r:id="rId3"/>
+              </a:rPr>
+              <a:t>cuinotes.com</a:t>
+            </a:r>
+            <a:r>
+              <a:rPr sz="1000">
+                <a:solidFill>
+                  <a:srgbClr val="8A939B"/>
+                </a:solidFill>
+              </a:rPr>
+              <a:t>  ·  15</a:t>
+            </a:r>
           </a:p>
         </p:txBody>
       </p:sp>
@@ -8042,79 +7857,44 @@
       </p:graphicFrame>
       <p:sp>
         <p:nvSpPr>
-          <p:cNvPr id="5" name="Text 2"/>
-          <p:cNvSpPr txBox="1"/>
-          <p:nvPr/>
-        </p:nvSpPr>
-        <p:spPr>
-          <a:xfrm>
-            <a:off x="640080" y="6446520"/>
-            <a:ext cx="8686800" cy="292608"/>
-          </a:xfrm>
-          <a:prstGeom prst="rect">
-            <a:avLst/>
-          </a:prstGeom>
-          <a:noFill/>
-          <a:ln/>
-        </p:spPr>
-        <p:txBody>
-          <a:bodyPr wrap="square" lIns="0" tIns="0" rIns="0" bIns="0" rtlCol="0" anchor="ctr"/>
-          <a:lstStyle/>
-          <a:p>
-            <a:pPr algn="l" indent="0" marL="0">
-              <a:buNone/>
-            </a:pPr>
-            <a:r>
-              <a:rPr lang="en-US" sz="900" dirty="0">
-                <a:solidFill>
-                  <a:srgbClr val="5D5D72"/>
-                </a:solidFill>
-                <a:latin typeface="Calibri" pitchFamily="34" charset="0"/>
-                <a:ea typeface="Calibri" pitchFamily="34" charset="-122"/>
-                <a:cs typeface="Calibri" pitchFamily="34" charset="-120"/>
-              </a:rPr>
-              <a:t>Usman Akram  •  COMSATS University Islamabad</a:t>
-            </a:r>
-            <a:endParaRPr lang="en-US" sz="900" dirty="0"/>
-          </a:p>
-        </p:txBody>
-      </p:sp>
-      <p:sp>
-        <p:nvSpPr>
-          <p:cNvPr id="6" name="Text 3"/>
-          <p:cNvSpPr txBox="1"/>
-          <p:nvPr/>
-        </p:nvSpPr>
-        <p:spPr>
-          <a:xfrm>
-            <a:off x="11155680" y="6446520"/>
-            <a:ext cx="457200" cy="292608"/>
-          </a:xfrm>
-          <a:prstGeom prst="rect">
-            <a:avLst/>
-          </a:prstGeom>
-          <a:noFill/>
-          <a:ln/>
-        </p:spPr>
-        <p:txBody>
-          <a:bodyPr wrap="square" lIns="0" tIns="0" rIns="0" bIns="0" rtlCol="0" anchor="ctr"/>
-          <a:lstStyle/>
-          <a:p>
-            <a:pPr algn="r" indent="0" marL="0">
-              <a:buNone/>
-            </a:pPr>
-            <a:r>
-              <a:rPr lang="en-US" sz="900" dirty="0">
-                <a:solidFill>
-                  <a:srgbClr val="5D5D72"/>
-                </a:solidFill>
-                <a:latin typeface="Calibri" pitchFamily="34" charset="0"/>
-                <a:ea typeface="Calibri" pitchFamily="34" charset="-122"/>
-                <a:cs typeface="Calibri" pitchFamily="34" charset="-120"/>
-              </a:rPr>
-              <a:t>16</a:t>
-            </a:r>
-            <a:endParaRPr lang="en-US" sz="900" dirty="0"/>
+          <p:cNvPr id="18" name="cuinotes-footer-mark"/>
+          <p:cNvSpPr txBox="1"/>
+          <p:nvPr/>
+        </p:nvSpPr>
+        <p:spPr>
+          <a:xfrm>
+            <a:off x="9951720" y="6455664"/>
+            <a:ext cx="2011680" cy="292608"/>
+          </a:xfrm>
+          <a:prstGeom prst="rect">
+            <a:avLst/>
+          </a:prstGeom>
+          <a:noFill/>
+        </p:spPr>
+        <p:txBody>
+          <a:bodyPr wrap="none" lIns="0" rIns="0" tIns="0" bIns="0">
+            <a:spAutoFit/>
+          </a:bodyPr>
+          <a:lstStyle/>
+          <a:p>
+            <a:pPr algn="r"/>
+            <a:r>
+              <a:rPr sz="1000">
+                <a:solidFill>
+                  <a:srgbClr val="8A939B"/>
+                </a:solidFill>
+                <a:hlinkClick r:id="rId3"/>
+              </a:rPr>
+              <a:t>cuinotes.com</a:t>
+            </a:r>
+            <a:r>
+              <a:rPr sz="1000">
+                <a:solidFill>
+                  <a:srgbClr val="8A939B"/>
+                </a:solidFill>
+              </a:rPr>
+              <a:t>  ·  16</a:t>
+            </a:r>
           </a:p>
         </p:txBody>
       </p:sp>
@@ -8247,6 +8027,10 @@
           </a:solidFill>
           <a:ln/>
         </p:spPr>
+        <p:txBody>
+          <a:bodyPr/>
+          <a:p/>
+        </p:txBody>
       </p:sp>
       <p:sp>
         <p:nvSpPr>
@@ -8345,6 +8129,10 @@
           </a:solidFill>
           <a:ln/>
         </p:spPr>
+        <p:txBody>
+          <a:bodyPr/>
+          <a:p/>
+        </p:txBody>
       </p:sp>
       <p:sp>
         <p:nvSpPr>
@@ -8443,6 +8231,10 @@
           </a:solidFill>
           <a:ln/>
         </p:spPr>
+        <p:txBody>
+          <a:bodyPr/>
+          <a:p/>
+        </p:txBody>
       </p:sp>
       <p:sp>
         <p:nvSpPr>
@@ -8524,79 +8316,44 @@
       </p:sp>
       <p:sp>
         <p:nvSpPr>
-          <p:cNvPr id="13" name="Text 11"/>
-          <p:cNvSpPr txBox="1"/>
-          <p:nvPr/>
-        </p:nvSpPr>
-        <p:spPr>
-          <a:xfrm>
-            <a:off x="640080" y="6446520"/>
-            <a:ext cx="8686800" cy="292608"/>
-          </a:xfrm>
-          <a:prstGeom prst="rect">
-            <a:avLst/>
-          </a:prstGeom>
-          <a:noFill/>
-          <a:ln/>
-        </p:spPr>
-        <p:txBody>
-          <a:bodyPr wrap="square" lIns="0" tIns="0" rIns="0" bIns="0" rtlCol="0" anchor="ctr"/>
-          <a:lstStyle/>
-          <a:p>
-            <a:pPr algn="l" indent="0" marL="0">
-              <a:buNone/>
-            </a:pPr>
-            <a:r>
-              <a:rPr lang="en-US" sz="900" dirty="0">
-                <a:solidFill>
-                  <a:srgbClr val="5D5D72"/>
-                </a:solidFill>
-                <a:latin typeface="Calibri" pitchFamily="34" charset="0"/>
-                <a:ea typeface="Calibri" pitchFamily="34" charset="-122"/>
-                <a:cs typeface="Calibri" pitchFamily="34" charset="-120"/>
-              </a:rPr>
-              <a:t>Usman Akram  •  COMSATS University Islamabad</a:t>
-            </a:r>
-            <a:endParaRPr lang="en-US" sz="900" dirty="0"/>
-          </a:p>
-        </p:txBody>
-      </p:sp>
-      <p:sp>
-        <p:nvSpPr>
-          <p:cNvPr id="14" name="Text 12"/>
-          <p:cNvSpPr txBox="1"/>
-          <p:nvPr/>
-        </p:nvSpPr>
-        <p:spPr>
-          <a:xfrm>
-            <a:off x="11155680" y="6446520"/>
-            <a:ext cx="457200" cy="292608"/>
-          </a:xfrm>
-          <a:prstGeom prst="rect">
-            <a:avLst/>
-          </a:prstGeom>
-          <a:noFill/>
-          <a:ln/>
-        </p:spPr>
-        <p:txBody>
-          <a:bodyPr wrap="square" lIns="0" tIns="0" rIns="0" bIns="0" rtlCol="0" anchor="ctr"/>
-          <a:lstStyle/>
-          <a:p>
-            <a:pPr algn="r" indent="0" marL="0">
-              <a:buNone/>
-            </a:pPr>
-            <a:r>
-              <a:rPr lang="en-US" sz="900" dirty="0">
-                <a:solidFill>
-                  <a:srgbClr val="5D5D72"/>
-                </a:solidFill>
-                <a:latin typeface="Calibri" pitchFamily="34" charset="0"/>
-                <a:ea typeface="Calibri" pitchFamily="34" charset="-122"/>
-                <a:cs typeface="Calibri" pitchFamily="34" charset="-120"/>
-              </a:rPr>
-              <a:t>17</a:t>
-            </a:r>
-            <a:endParaRPr lang="en-US" sz="900" dirty="0"/>
+          <p:cNvPr id="15" name="cuinotes-footer-mark"/>
+          <p:cNvSpPr txBox="1"/>
+          <p:nvPr/>
+        </p:nvSpPr>
+        <p:spPr>
+          <a:xfrm>
+            <a:off x="9951720" y="6455664"/>
+            <a:ext cx="2011680" cy="292608"/>
+          </a:xfrm>
+          <a:prstGeom prst="rect">
+            <a:avLst/>
+          </a:prstGeom>
+          <a:noFill/>
+        </p:spPr>
+        <p:txBody>
+          <a:bodyPr wrap="none" lIns="0" rIns="0" tIns="0" bIns="0">
+            <a:spAutoFit/>
+          </a:bodyPr>
+          <a:lstStyle/>
+          <a:p>
+            <a:pPr algn="r"/>
+            <a:r>
+              <a:rPr sz="1000">
+                <a:solidFill>
+                  <a:srgbClr val="8A939B"/>
+                </a:solidFill>
+                <a:hlinkClick r:id="rId3"/>
+              </a:rPr>
+              <a:t>cuinotes.com</a:t>
+            </a:r>
+            <a:r>
+              <a:rPr sz="1000">
+                <a:solidFill>
+                  <a:srgbClr val="8A939B"/>
+                </a:solidFill>
+              </a:rPr>
+              <a:t>  ·  17</a:t>
+            </a:r>
           </a:p>
         </p:txBody>
       </p:sp>
@@ -8733,6 +8490,10 @@
             <a:tailEnd type="triangle"/>
           </a:ln>
         </p:spPr>
+        <p:txBody>
+          <a:bodyPr/>
+          <a:p/>
+        </p:txBody>
       </p:sp>
       <p:sp>
         <p:nvSpPr>
@@ -8757,6 +8518,10 @@
             <a:tailEnd type="triangle"/>
           </a:ln>
         </p:spPr>
+        <p:txBody>
+          <a:bodyPr/>
+          <a:p/>
+        </p:txBody>
       </p:sp>
       <p:sp>
         <p:nvSpPr>
@@ -8781,6 +8546,10 @@
             <a:tailEnd type="triangle"/>
           </a:ln>
         </p:spPr>
+        <p:txBody>
+          <a:bodyPr/>
+          <a:p/>
+        </p:txBody>
       </p:sp>
       <p:sp>
         <p:nvSpPr>
@@ -8805,6 +8574,10 @@
             <a:tailEnd type="triangle"/>
           </a:ln>
         </p:spPr>
+        <p:txBody>
+          <a:bodyPr/>
+          <a:p/>
+        </p:txBody>
       </p:sp>
       <p:sp>
         <p:nvSpPr>
@@ -8829,6 +8602,10 @@
             <a:tailEnd type="triangle"/>
           </a:ln>
         </p:spPr>
+        <p:txBody>
+          <a:bodyPr/>
+          <a:p/>
+        </p:txBody>
       </p:sp>
       <p:sp>
         <p:nvSpPr>
@@ -8853,6 +8630,10 @@
             <a:tailEnd type="triangle"/>
           </a:ln>
         </p:spPr>
+        <p:txBody>
+          <a:bodyPr/>
+          <a:p/>
+        </p:txBody>
       </p:sp>
       <p:sp>
         <p:nvSpPr>
@@ -8914,6 +8695,10 @@
           </a:solidFill>
           <a:ln/>
         </p:spPr>
+        <p:txBody>
+          <a:bodyPr/>
+          <a:p/>
+        </p:txBody>
       </p:sp>
       <p:sp>
         <p:nvSpPr>
@@ -8996,6 +8781,10 @@
           </a:solidFill>
           <a:ln/>
         </p:spPr>
+        <p:txBody>
+          <a:bodyPr/>
+          <a:p/>
+        </p:txBody>
       </p:sp>
       <p:sp>
         <p:nvSpPr>
@@ -9078,6 +8867,10 @@
           </a:solidFill>
           <a:ln/>
         </p:spPr>
+        <p:txBody>
+          <a:bodyPr/>
+          <a:p/>
+        </p:txBody>
       </p:sp>
       <p:sp>
         <p:nvSpPr>
@@ -9160,6 +8953,10 @@
           </a:solidFill>
           <a:ln/>
         </p:spPr>
+        <p:txBody>
+          <a:bodyPr/>
+          <a:p/>
+        </p:txBody>
       </p:sp>
       <p:sp>
         <p:nvSpPr>
@@ -9242,6 +9039,10 @@
           </a:solidFill>
           <a:ln/>
         </p:spPr>
+        <p:txBody>
+          <a:bodyPr/>
+          <a:p/>
+        </p:txBody>
       </p:sp>
       <p:sp>
         <p:nvSpPr>
@@ -9324,6 +9125,10 @@
           </a:solidFill>
           <a:ln/>
         </p:spPr>
+        <p:txBody>
+          <a:bodyPr/>
+          <a:p/>
+        </p:txBody>
       </p:sp>
       <p:sp>
         <p:nvSpPr>
@@ -9428,79 +9233,44 @@
       </p:sp>
       <p:sp>
         <p:nvSpPr>
-          <p:cNvPr id="24" name="Text 22"/>
-          <p:cNvSpPr txBox="1"/>
-          <p:nvPr/>
-        </p:nvSpPr>
-        <p:spPr>
-          <a:xfrm>
-            <a:off x="640080" y="6446520"/>
-            <a:ext cx="8686800" cy="292608"/>
-          </a:xfrm>
-          <a:prstGeom prst="rect">
-            <a:avLst/>
-          </a:prstGeom>
-          <a:noFill/>
-          <a:ln/>
-        </p:spPr>
-        <p:txBody>
-          <a:bodyPr wrap="square" lIns="0" tIns="0" rIns="0" bIns="0" rtlCol="0" anchor="ctr"/>
-          <a:lstStyle/>
-          <a:p>
-            <a:pPr algn="l" indent="0" marL="0">
-              <a:buNone/>
-            </a:pPr>
-            <a:r>
-              <a:rPr lang="en-US" sz="900" dirty="0">
-                <a:solidFill>
-                  <a:srgbClr val="5D5D72"/>
-                </a:solidFill>
-                <a:latin typeface="Calibri" pitchFamily="34" charset="0"/>
-                <a:ea typeface="Calibri" pitchFamily="34" charset="-122"/>
-                <a:cs typeface="Calibri" pitchFamily="34" charset="-120"/>
-              </a:rPr>
-              <a:t>Usman Akram  •  COMSATS University Islamabad</a:t>
-            </a:r>
-            <a:endParaRPr lang="en-US" sz="900" dirty="0"/>
-          </a:p>
-        </p:txBody>
-      </p:sp>
-      <p:sp>
-        <p:nvSpPr>
-          <p:cNvPr id="25" name="Text 23"/>
-          <p:cNvSpPr txBox="1"/>
-          <p:nvPr/>
-        </p:nvSpPr>
-        <p:spPr>
-          <a:xfrm>
-            <a:off x="11155680" y="6446520"/>
-            <a:ext cx="457200" cy="292608"/>
-          </a:xfrm>
-          <a:prstGeom prst="rect">
-            <a:avLst/>
-          </a:prstGeom>
-          <a:noFill/>
-          <a:ln/>
-        </p:spPr>
-        <p:txBody>
-          <a:bodyPr wrap="square" lIns="0" tIns="0" rIns="0" bIns="0" rtlCol="0" anchor="ctr"/>
-          <a:lstStyle/>
-          <a:p>
-            <a:pPr algn="r" indent="0" marL="0">
-              <a:buNone/>
-            </a:pPr>
-            <a:r>
-              <a:rPr lang="en-US" sz="900" dirty="0">
-                <a:solidFill>
-                  <a:srgbClr val="5D5D72"/>
-                </a:solidFill>
-                <a:latin typeface="Calibri" pitchFamily="34" charset="0"/>
-                <a:ea typeface="Calibri" pitchFamily="34" charset="-122"/>
-                <a:cs typeface="Calibri" pitchFamily="34" charset="-120"/>
-              </a:rPr>
-              <a:t>18</a:t>
-            </a:r>
-            <a:endParaRPr lang="en-US" sz="900" dirty="0"/>
+          <p:cNvPr id="26" name="cuinotes-footer-mark"/>
+          <p:cNvSpPr txBox="1"/>
+          <p:nvPr/>
+        </p:nvSpPr>
+        <p:spPr>
+          <a:xfrm>
+            <a:off x="9951720" y="6455664"/>
+            <a:ext cx="2011680" cy="292608"/>
+          </a:xfrm>
+          <a:prstGeom prst="rect">
+            <a:avLst/>
+          </a:prstGeom>
+          <a:noFill/>
+        </p:spPr>
+        <p:txBody>
+          <a:bodyPr wrap="none" lIns="0" rIns="0" tIns="0" bIns="0">
+            <a:spAutoFit/>
+          </a:bodyPr>
+          <a:lstStyle/>
+          <a:p>
+            <a:pPr algn="r"/>
+            <a:r>
+              <a:rPr sz="1000">
+                <a:solidFill>
+                  <a:srgbClr val="8A939B"/>
+                </a:solidFill>
+                <a:hlinkClick r:id="rId3"/>
+              </a:rPr>
+              <a:t>cuinotes.com</a:t>
+            </a:r>
+            <a:r>
+              <a:rPr sz="1000">
+                <a:solidFill>
+                  <a:srgbClr val="8A939B"/>
+                </a:solidFill>
+              </a:rPr>
+              <a:t>  ·  18</a:t>
+            </a:r>
           </a:p>
         </p:txBody>
       </p:sp>
@@ -9635,6 +9405,10 @@
           </a:solidFill>
           <a:ln/>
         </p:spPr>
+        <p:txBody>
+          <a:bodyPr/>
+          <a:p/>
+        </p:txBody>
       </p:sp>
       <p:sp>
         <p:nvSpPr>
@@ -9759,79 +9533,44 @@
       </p:sp>
       <p:sp>
         <p:nvSpPr>
-          <p:cNvPr id="7" name="Text 5"/>
-          <p:cNvSpPr txBox="1"/>
-          <p:nvPr/>
-        </p:nvSpPr>
-        <p:spPr>
-          <a:xfrm>
-            <a:off x="640080" y="6446520"/>
-            <a:ext cx="8686800" cy="292608"/>
-          </a:xfrm>
-          <a:prstGeom prst="rect">
-            <a:avLst/>
-          </a:prstGeom>
-          <a:noFill/>
-          <a:ln/>
-        </p:spPr>
-        <p:txBody>
-          <a:bodyPr wrap="square" lIns="0" tIns="0" rIns="0" bIns="0" rtlCol="0" anchor="ctr"/>
-          <a:lstStyle/>
-          <a:p>
-            <a:pPr algn="l" indent="0" marL="0">
-              <a:buNone/>
-            </a:pPr>
-            <a:r>
-              <a:rPr lang="en-US" sz="900" dirty="0">
-                <a:solidFill>
-                  <a:srgbClr val="5D5D72"/>
-                </a:solidFill>
-                <a:latin typeface="Calibri" pitchFamily="34" charset="0"/>
-                <a:ea typeface="Calibri" pitchFamily="34" charset="-122"/>
-                <a:cs typeface="Calibri" pitchFamily="34" charset="-120"/>
-              </a:rPr>
-              <a:t>Usman Akram  •  COMSATS University Islamabad</a:t>
-            </a:r>
-            <a:endParaRPr lang="en-US" sz="900" dirty="0"/>
-          </a:p>
-        </p:txBody>
-      </p:sp>
-      <p:sp>
-        <p:nvSpPr>
-          <p:cNvPr id="8" name="Text 6"/>
-          <p:cNvSpPr txBox="1"/>
-          <p:nvPr/>
-        </p:nvSpPr>
-        <p:spPr>
-          <a:xfrm>
-            <a:off x="11155680" y="6446520"/>
-            <a:ext cx="457200" cy="292608"/>
-          </a:xfrm>
-          <a:prstGeom prst="rect">
-            <a:avLst/>
-          </a:prstGeom>
-          <a:noFill/>
-          <a:ln/>
-        </p:spPr>
-        <p:txBody>
-          <a:bodyPr wrap="square" lIns="0" tIns="0" rIns="0" bIns="0" rtlCol="0" anchor="ctr"/>
-          <a:lstStyle/>
-          <a:p>
-            <a:pPr algn="r" indent="0" marL="0">
-              <a:buNone/>
-            </a:pPr>
-            <a:r>
-              <a:rPr lang="en-US" sz="900" dirty="0">
-                <a:solidFill>
-                  <a:srgbClr val="5D5D72"/>
-                </a:solidFill>
-                <a:latin typeface="Calibri" pitchFamily="34" charset="0"/>
-                <a:ea typeface="Calibri" pitchFamily="34" charset="-122"/>
-                <a:cs typeface="Calibri" pitchFamily="34" charset="-120"/>
-              </a:rPr>
-              <a:t>19</a:t>
-            </a:r>
-            <a:endParaRPr lang="en-US" sz="900" dirty="0"/>
+          <p:cNvPr id="9" name="cuinotes-footer-mark"/>
+          <p:cNvSpPr txBox="1"/>
+          <p:nvPr/>
+        </p:nvSpPr>
+        <p:spPr>
+          <a:xfrm>
+            <a:off x="9951720" y="6455664"/>
+            <a:ext cx="2011680" cy="292608"/>
+          </a:xfrm>
+          <a:prstGeom prst="rect">
+            <a:avLst/>
+          </a:prstGeom>
+          <a:noFill/>
+        </p:spPr>
+        <p:txBody>
+          <a:bodyPr wrap="none" lIns="0" rIns="0" tIns="0" bIns="0">
+            <a:spAutoFit/>
+          </a:bodyPr>
+          <a:lstStyle/>
+          <a:p>
+            <a:pPr algn="r"/>
+            <a:r>
+              <a:rPr sz="1000">
+                <a:solidFill>
+                  <a:srgbClr val="8A939B"/>
+                </a:solidFill>
+                <a:hlinkClick r:id="rId3"/>
+              </a:rPr>
+              <a:t>cuinotes.com</a:t>
+            </a:r>
+            <a:r>
+              <a:rPr sz="1000">
+                <a:solidFill>
+                  <a:srgbClr val="8A939B"/>
+                </a:solidFill>
+              </a:rPr>
+              <a:t>  ·  19</a:t>
+            </a:r>
           </a:p>
         </p:txBody>
       </p:sp>
@@ -9964,6 +9703,10 @@
           </a:solidFill>
           <a:ln/>
         </p:spPr>
+        <p:txBody>
+          <a:bodyPr/>
+          <a:p/>
+        </p:txBody>
       </p:sp>
       <p:sp>
         <p:nvSpPr>
@@ -10062,6 +9805,10 @@
           </a:solidFill>
           <a:ln/>
         </p:spPr>
+        <p:txBody>
+          <a:bodyPr/>
+          <a:p/>
+        </p:txBody>
       </p:sp>
       <p:sp>
         <p:nvSpPr>
@@ -10160,6 +9907,10 @@
           </a:solidFill>
           <a:ln/>
         </p:spPr>
+        <p:txBody>
+          <a:bodyPr/>
+          <a:p/>
+        </p:txBody>
       </p:sp>
       <p:sp>
         <p:nvSpPr>
@@ -10258,6 +10009,10 @@
           </a:solidFill>
           <a:ln/>
         </p:spPr>
+        <p:txBody>
+          <a:bodyPr/>
+          <a:p/>
+        </p:txBody>
       </p:sp>
       <p:sp>
         <p:nvSpPr>
@@ -10339,79 +10094,44 @@
       </p:sp>
       <p:sp>
         <p:nvSpPr>
-          <p:cNvPr id="16" name="Text 14"/>
-          <p:cNvSpPr txBox="1"/>
-          <p:nvPr/>
-        </p:nvSpPr>
-        <p:spPr>
-          <a:xfrm>
-            <a:off x="640080" y="6446520"/>
-            <a:ext cx="8686800" cy="292608"/>
-          </a:xfrm>
-          <a:prstGeom prst="rect">
-            <a:avLst/>
-          </a:prstGeom>
-          <a:noFill/>
-          <a:ln/>
-        </p:spPr>
-        <p:txBody>
-          <a:bodyPr wrap="square" lIns="0" tIns="0" rIns="0" bIns="0" rtlCol="0" anchor="ctr"/>
-          <a:lstStyle/>
-          <a:p>
-            <a:pPr algn="l" indent="0" marL="0">
-              <a:buNone/>
-            </a:pPr>
-            <a:r>
-              <a:rPr lang="en-US" sz="900" dirty="0">
-                <a:solidFill>
-                  <a:srgbClr val="5D5D72"/>
-                </a:solidFill>
-                <a:latin typeface="Calibri" pitchFamily="34" charset="0"/>
-                <a:ea typeface="Calibri" pitchFamily="34" charset="-122"/>
-                <a:cs typeface="Calibri" pitchFamily="34" charset="-120"/>
-              </a:rPr>
-              <a:t>Usman Akram  •  COMSATS University Islamabad</a:t>
-            </a:r>
-            <a:endParaRPr lang="en-US" sz="900" dirty="0"/>
-          </a:p>
-        </p:txBody>
-      </p:sp>
-      <p:sp>
-        <p:nvSpPr>
-          <p:cNvPr id="17" name="Text 15"/>
-          <p:cNvSpPr txBox="1"/>
-          <p:nvPr/>
-        </p:nvSpPr>
-        <p:spPr>
-          <a:xfrm>
-            <a:off x="11155680" y="6446520"/>
-            <a:ext cx="457200" cy="292608"/>
-          </a:xfrm>
-          <a:prstGeom prst="rect">
-            <a:avLst/>
-          </a:prstGeom>
-          <a:noFill/>
-          <a:ln/>
-        </p:spPr>
-        <p:txBody>
-          <a:bodyPr wrap="square" lIns="0" tIns="0" rIns="0" bIns="0" rtlCol="0" anchor="ctr"/>
-          <a:lstStyle/>
-          <a:p>
-            <a:pPr algn="r" indent="0" marL="0">
-              <a:buNone/>
-            </a:pPr>
-            <a:r>
-              <a:rPr lang="en-US" sz="900" dirty="0">
-                <a:solidFill>
-                  <a:srgbClr val="5D5D72"/>
-                </a:solidFill>
-                <a:latin typeface="Calibri" pitchFamily="34" charset="0"/>
-                <a:ea typeface="Calibri" pitchFamily="34" charset="-122"/>
-                <a:cs typeface="Calibri" pitchFamily="34" charset="-120"/>
-              </a:rPr>
-              <a:t>2</a:t>
-            </a:r>
-            <a:endParaRPr lang="en-US" sz="900" dirty="0"/>
+          <p:cNvPr id="18" name="cuinotes-footer-mark"/>
+          <p:cNvSpPr txBox="1"/>
+          <p:nvPr/>
+        </p:nvSpPr>
+        <p:spPr>
+          <a:xfrm>
+            <a:off x="9951720" y="6455664"/>
+            <a:ext cx="2011680" cy="292608"/>
+          </a:xfrm>
+          <a:prstGeom prst="rect">
+            <a:avLst/>
+          </a:prstGeom>
+          <a:noFill/>
+        </p:spPr>
+        <p:txBody>
+          <a:bodyPr wrap="none" lIns="0" rIns="0" tIns="0" bIns="0">
+            <a:spAutoFit/>
+          </a:bodyPr>
+          <a:lstStyle/>
+          <a:p>
+            <a:pPr algn="r"/>
+            <a:r>
+              <a:rPr sz="1000">
+                <a:solidFill>
+                  <a:srgbClr val="8A939B"/>
+                </a:solidFill>
+                <a:hlinkClick r:id="rId3"/>
+              </a:rPr>
+              <a:t>cuinotes.com</a:t>
+            </a:r>
+            <a:r>
+              <a:rPr sz="1000">
+                <a:solidFill>
+                  <a:srgbClr val="8A939B"/>
+                </a:solidFill>
+              </a:rPr>
+              <a:t>  ·  2</a:t>
+            </a:r>
           </a:p>
         </p:txBody>
       </p:sp>
@@ -10546,6 +10266,10 @@
           </a:solidFill>
           <a:ln/>
         </p:spPr>
+        <p:txBody>
+          <a:bodyPr/>
+          <a:p/>
+        </p:txBody>
       </p:sp>
       <p:sp>
         <p:nvSpPr>
@@ -10710,79 +10434,44 @@
       </p:sp>
       <p:sp>
         <p:nvSpPr>
-          <p:cNvPr id="7" name="Text 5"/>
-          <p:cNvSpPr txBox="1"/>
-          <p:nvPr/>
-        </p:nvSpPr>
-        <p:spPr>
-          <a:xfrm>
-            <a:off x="640080" y="6446520"/>
-            <a:ext cx="8686800" cy="292608"/>
-          </a:xfrm>
-          <a:prstGeom prst="rect">
-            <a:avLst/>
-          </a:prstGeom>
-          <a:noFill/>
-          <a:ln/>
-        </p:spPr>
-        <p:txBody>
-          <a:bodyPr wrap="square" lIns="0" tIns="0" rIns="0" bIns="0" rtlCol="0" anchor="ctr"/>
-          <a:lstStyle/>
-          <a:p>
-            <a:pPr algn="l" indent="0" marL="0">
-              <a:buNone/>
-            </a:pPr>
-            <a:r>
-              <a:rPr lang="en-US" sz="900" dirty="0">
-                <a:solidFill>
-                  <a:srgbClr val="5D5D72"/>
-                </a:solidFill>
-                <a:latin typeface="Calibri" pitchFamily="34" charset="0"/>
-                <a:ea typeface="Calibri" pitchFamily="34" charset="-122"/>
-                <a:cs typeface="Calibri" pitchFamily="34" charset="-120"/>
-              </a:rPr>
-              <a:t>Usman Akram  •  COMSATS University Islamabad</a:t>
-            </a:r>
-            <a:endParaRPr lang="en-US" sz="900" dirty="0"/>
-          </a:p>
-        </p:txBody>
-      </p:sp>
-      <p:sp>
-        <p:nvSpPr>
-          <p:cNvPr id="8" name="Text 6"/>
-          <p:cNvSpPr txBox="1"/>
-          <p:nvPr/>
-        </p:nvSpPr>
-        <p:spPr>
-          <a:xfrm>
-            <a:off x="11155680" y="6446520"/>
-            <a:ext cx="457200" cy="292608"/>
-          </a:xfrm>
-          <a:prstGeom prst="rect">
-            <a:avLst/>
-          </a:prstGeom>
-          <a:noFill/>
-          <a:ln/>
-        </p:spPr>
-        <p:txBody>
-          <a:bodyPr wrap="square" lIns="0" tIns="0" rIns="0" bIns="0" rtlCol="0" anchor="ctr"/>
-          <a:lstStyle/>
-          <a:p>
-            <a:pPr algn="r" indent="0" marL="0">
-              <a:buNone/>
-            </a:pPr>
-            <a:r>
-              <a:rPr lang="en-US" sz="900" dirty="0">
-                <a:solidFill>
-                  <a:srgbClr val="5D5D72"/>
-                </a:solidFill>
-                <a:latin typeface="Calibri" pitchFamily="34" charset="0"/>
-                <a:ea typeface="Calibri" pitchFamily="34" charset="-122"/>
-                <a:cs typeface="Calibri" pitchFamily="34" charset="-120"/>
-              </a:rPr>
-              <a:t>20</a:t>
-            </a:r>
-            <a:endParaRPr lang="en-US" sz="900" dirty="0"/>
+          <p:cNvPr id="9" name="cuinotes-footer-mark"/>
+          <p:cNvSpPr txBox="1"/>
+          <p:nvPr/>
+        </p:nvSpPr>
+        <p:spPr>
+          <a:xfrm>
+            <a:off x="9951720" y="6455664"/>
+            <a:ext cx="2011680" cy="292608"/>
+          </a:xfrm>
+          <a:prstGeom prst="rect">
+            <a:avLst/>
+          </a:prstGeom>
+          <a:noFill/>
+        </p:spPr>
+        <p:txBody>
+          <a:bodyPr wrap="none" lIns="0" rIns="0" tIns="0" bIns="0">
+            <a:spAutoFit/>
+          </a:bodyPr>
+          <a:lstStyle/>
+          <a:p>
+            <a:pPr algn="r"/>
+            <a:r>
+              <a:rPr sz="1000">
+                <a:solidFill>
+                  <a:srgbClr val="8A939B"/>
+                </a:solidFill>
+                <a:hlinkClick r:id="rId3"/>
+              </a:rPr>
+              <a:t>cuinotes.com</a:t>
+            </a:r>
+            <a:r>
+              <a:rPr sz="1000">
+                <a:solidFill>
+                  <a:srgbClr val="8A939B"/>
+                </a:solidFill>
+              </a:rPr>
+              <a:t>  ·  20</a:t>
+            </a:r>
           </a:p>
         </p:txBody>
       </p:sp>
@@ -10915,6 +10604,10 @@
           </a:solidFill>
           <a:ln/>
         </p:spPr>
+        <p:txBody>
+          <a:bodyPr/>
+          <a:p/>
+        </p:txBody>
       </p:sp>
       <p:sp>
         <p:nvSpPr>
@@ -11013,6 +10706,10 @@
           </a:solidFill>
           <a:ln/>
         </p:spPr>
+        <p:txBody>
+          <a:bodyPr/>
+          <a:p/>
+        </p:txBody>
       </p:sp>
       <p:sp>
         <p:nvSpPr>
@@ -11111,6 +10808,10 @@
           </a:solidFill>
           <a:ln/>
         </p:spPr>
+        <p:txBody>
+          <a:bodyPr/>
+          <a:p/>
+        </p:txBody>
       </p:sp>
       <p:sp>
         <p:nvSpPr>
@@ -11209,6 +10910,10 @@
           </a:solidFill>
           <a:ln/>
         </p:spPr>
+        <p:txBody>
+          <a:bodyPr/>
+          <a:p/>
+        </p:txBody>
       </p:sp>
       <p:sp>
         <p:nvSpPr>
@@ -11307,6 +11012,10 @@
           </a:solidFill>
           <a:ln/>
         </p:spPr>
+        <p:txBody>
+          <a:bodyPr/>
+          <a:p/>
+        </p:txBody>
       </p:sp>
       <p:sp>
         <p:nvSpPr>
@@ -11388,79 +11097,44 @@
       </p:sp>
       <p:sp>
         <p:nvSpPr>
-          <p:cNvPr id="19" name="Text 17"/>
-          <p:cNvSpPr txBox="1"/>
-          <p:nvPr/>
-        </p:nvSpPr>
-        <p:spPr>
-          <a:xfrm>
-            <a:off x="640080" y="6446520"/>
-            <a:ext cx="8686800" cy="292608"/>
-          </a:xfrm>
-          <a:prstGeom prst="rect">
-            <a:avLst/>
-          </a:prstGeom>
-          <a:noFill/>
-          <a:ln/>
-        </p:spPr>
-        <p:txBody>
-          <a:bodyPr wrap="square" lIns="0" tIns="0" rIns="0" bIns="0" rtlCol="0" anchor="ctr"/>
-          <a:lstStyle/>
-          <a:p>
-            <a:pPr algn="l" indent="0" marL="0">
-              <a:buNone/>
-            </a:pPr>
-            <a:r>
-              <a:rPr lang="en-US" sz="900" dirty="0">
-                <a:solidFill>
-                  <a:srgbClr val="5D5D72"/>
-                </a:solidFill>
-                <a:latin typeface="Calibri" pitchFamily="34" charset="0"/>
-                <a:ea typeface="Calibri" pitchFamily="34" charset="-122"/>
-                <a:cs typeface="Calibri" pitchFamily="34" charset="-120"/>
-              </a:rPr>
-              <a:t>Usman Akram  •  COMSATS University Islamabad</a:t>
-            </a:r>
-            <a:endParaRPr lang="en-US" sz="900" dirty="0"/>
-          </a:p>
-        </p:txBody>
-      </p:sp>
-      <p:sp>
-        <p:nvSpPr>
-          <p:cNvPr id="20" name="Text 18"/>
-          <p:cNvSpPr txBox="1"/>
-          <p:nvPr/>
-        </p:nvSpPr>
-        <p:spPr>
-          <a:xfrm>
-            <a:off x="11155680" y="6446520"/>
-            <a:ext cx="457200" cy="292608"/>
-          </a:xfrm>
-          <a:prstGeom prst="rect">
-            <a:avLst/>
-          </a:prstGeom>
-          <a:noFill/>
-          <a:ln/>
-        </p:spPr>
-        <p:txBody>
-          <a:bodyPr wrap="square" lIns="0" tIns="0" rIns="0" bIns="0" rtlCol="0" anchor="ctr"/>
-          <a:lstStyle/>
-          <a:p>
-            <a:pPr algn="r" indent="0" marL="0">
-              <a:buNone/>
-            </a:pPr>
-            <a:r>
-              <a:rPr lang="en-US" sz="900" dirty="0">
-                <a:solidFill>
-                  <a:srgbClr val="5D5D72"/>
-                </a:solidFill>
-                <a:latin typeface="Calibri" pitchFamily="34" charset="0"/>
-                <a:ea typeface="Calibri" pitchFamily="34" charset="-122"/>
-                <a:cs typeface="Calibri" pitchFamily="34" charset="-120"/>
-              </a:rPr>
-              <a:t>21</a:t>
-            </a:r>
-            <a:endParaRPr lang="en-US" sz="900" dirty="0"/>
+          <p:cNvPr id="21" name="cuinotes-footer-mark"/>
+          <p:cNvSpPr txBox="1"/>
+          <p:nvPr/>
+        </p:nvSpPr>
+        <p:spPr>
+          <a:xfrm>
+            <a:off x="9951720" y="6455664"/>
+            <a:ext cx="2011680" cy="292608"/>
+          </a:xfrm>
+          <a:prstGeom prst="rect">
+            <a:avLst/>
+          </a:prstGeom>
+          <a:noFill/>
+        </p:spPr>
+        <p:txBody>
+          <a:bodyPr wrap="none" lIns="0" rIns="0" tIns="0" bIns="0">
+            <a:spAutoFit/>
+          </a:bodyPr>
+          <a:lstStyle/>
+          <a:p>
+            <a:pPr algn="r"/>
+            <a:r>
+              <a:rPr sz="1000">
+                <a:solidFill>
+                  <a:srgbClr val="8A939B"/>
+                </a:solidFill>
+                <a:hlinkClick r:id="rId3"/>
+              </a:rPr>
+              <a:t>cuinotes.com</a:t>
+            </a:r>
+            <a:r>
+              <a:rPr sz="1000">
+                <a:solidFill>
+                  <a:srgbClr val="8A939B"/>
+                </a:solidFill>
+              </a:rPr>
+              <a:t>  ·  21</a:t>
+            </a:r>
           </a:p>
         </p:txBody>
       </p:sp>
@@ -11593,6 +11267,10 @@
           </a:solidFill>
           <a:ln/>
         </p:spPr>
+        <p:txBody>
+          <a:bodyPr/>
+          <a:p/>
+        </p:txBody>
       </p:sp>
       <p:sp>
         <p:nvSpPr>
@@ -11691,6 +11369,10 @@
           </a:solidFill>
           <a:ln/>
         </p:spPr>
+        <p:txBody>
+          <a:bodyPr/>
+          <a:p/>
+        </p:txBody>
       </p:sp>
       <p:sp>
         <p:nvSpPr>
@@ -11789,6 +11471,10 @@
           </a:solidFill>
           <a:ln/>
         </p:spPr>
+        <p:txBody>
+          <a:bodyPr/>
+          <a:p/>
+        </p:txBody>
       </p:sp>
       <p:sp>
         <p:nvSpPr>
@@ -11887,6 +11573,10 @@
           </a:solidFill>
           <a:ln/>
         </p:spPr>
+        <p:txBody>
+          <a:bodyPr/>
+          <a:p/>
+        </p:txBody>
       </p:sp>
       <p:sp>
         <p:nvSpPr>
@@ -11985,6 +11675,10 @@
           </a:solidFill>
           <a:ln/>
         </p:spPr>
+        <p:txBody>
+          <a:bodyPr/>
+          <a:p/>
+        </p:txBody>
       </p:sp>
       <p:sp>
         <p:nvSpPr>
@@ -12066,79 +11760,44 @@
       </p:sp>
       <p:sp>
         <p:nvSpPr>
-          <p:cNvPr id="19" name="Text 17"/>
-          <p:cNvSpPr txBox="1"/>
-          <p:nvPr/>
-        </p:nvSpPr>
-        <p:spPr>
-          <a:xfrm>
-            <a:off x="640080" y="6446520"/>
-            <a:ext cx="8686800" cy="292608"/>
-          </a:xfrm>
-          <a:prstGeom prst="rect">
-            <a:avLst/>
-          </a:prstGeom>
-          <a:noFill/>
-          <a:ln/>
-        </p:spPr>
-        <p:txBody>
-          <a:bodyPr wrap="square" lIns="0" tIns="0" rIns="0" bIns="0" rtlCol="0" anchor="ctr"/>
-          <a:lstStyle/>
-          <a:p>
-            <a:pPr algn="l" indent="0" marL="0">
-              <a:buNone/>
-            </a:pPr>
-            <a:r>
-              <a:rPr lang="en-US" sz="900" dirty="0">
-                <a:solidFill>
-                  <a:srgbClr val="5D5D72"/>
-                </a:solidFill>
-                <a:latin typeface="Calibri" pitchFamily="34" charset="0"/>
-                <a:ea typeface="Calibri" pitchFamily="34" charset="-122"/>
-                <a:cs typeface="Calibri" pitchFamily="34" charset="-120"/>
-              </a:rPr>
-              <a:t>Usman Akram  •  COMSATS University Islamabad</a:t>
-            </a:r>
-            <a:endParaRPr lang="en-US" sz="900" dirty="0"/>
-          </a:p>
-        </p:txBody>
-      </p:sp>
-      <p:sp>
-        <p:nvSpPr>
-          <p:cNvPr id="20" name="Text 18"/>
-          <p:cNvSpPr txBox="1"/>
-          <p:nvPr/>
-        </p:nvSpPr>
-        <p:spPr>
-          <a:xfrm>
-            <a:off x="11155680" y="6446520"/>
-            <a:ext cx="457200" cy="292608"/>
-          </a:xfrm>
-          <a:prstGeom prst="rect">
-            <a:avLst/>
-          </a:prstGeom>
-          <a:noFill/>
-          <a:ln/>
-        </p:spPr>
-        <p:txBody>
-          <a:bodyPr wrap="square" lIns="0" tIns="0" rIns="0" bIns="0" rtlCol="0" anchor="ctr"/>
-          <a:lstStyle/>
-          <a:p>
-            <a:pPr algn="r" indent="0" marL="0">
-              <a:buNone/>
-            </a:pPr>
-            <a:r>
-              <a:rPr lang="en-US" sz="900" dirty="0">
-                <a:solidFill>
-                  <a:srgbClr val="5D5D72"/>
-                </a:solidFill>
-                <a:latin typeface="Calibri" pitchFamily="34" charset="0"/>
-                <a:ea typeface="Calibri" pitchFamily="34" charset="-122"/>
-                <a:cs typeface="Calibri" pitchFamily="34" charset="-120"/>
-              </a:rPr>
-              <a:t>22</a:t>
-            </a:r>
-            <a:endParaRPr lang="en-US" sz="900" dirty="0"/>
+          <p:cNvPr id="21" name="cuinotes-footer-mark"/>
+          <p:cNvSpPr txBox="1"/>
+          <p:nvPr/>
+        </p:nvSpPr>
+        <p:spPr>
+          <a:xfrm>
+            <a:off x="9951720" y="6455664"/>
+            <a:ext cx="2011680" cy="292608"/>
+          </a:xfrm>
+          <a:prstGeom prst="rect">
+            <a:avLst/>
+          </a:prstGeom>
+          <a:noFill/>
+        </p:spPr>
+        <p:txBody>
+          <a:bodyPr wrap="none" lIns="0" rIns="0" tIns="0" bIns="0">
+            <a:spAutoFit/>
+          </a:bodyPr>
+          <a:lstStyle/>
+          <a:p>
+            <a:pPr algn="r"/>
+            <a:r>
+              <a:rPr sz="1000">
+                <a:solidFill>
+                  <a:srgbClr val="8A939B"/>
+                </a:solidFill>
+                <a:hlinkClick r:id="rId3"/>
+              </a:rPr>
+              <a:t>cuinotes.com</a:t>
+            </a:r>
+            <a:r>
+              <a:rPr sz="1000">
+                <a:solidFill>
+                  <a:srgbClr val="8A939B"/>
+                </a:solidFill>
+              </a:rPr>
+              <a:t>  ·  22</a:t>
+            </a:r>
           </a:p>
         </p:txBody>
       </p:sp>
@@ -12278,6 +11937,10 @@
             <a:prstDash val="solid"/>
           </a:ln>
         </p:spPr>
+        <p:txBody>
+          <a:bodyPr/>
+          <a:p/>
+        </p:txBody>
       </p:sp>
       <p:sp>
         <p:nvSpPr>
@@ -12359,79 +12022,44 @@
       </p:sp>
       <p:sp>
         <p:nvSpPr>
-          <p:cNvPr id="7" name="Text 5"/>
-          <p:cNvSpPr txBox="1"/>
-          <p:nvPr/>
-        </p:nvSpPr>
-        <p:spPr>
-          <a:xfrm>
-            <a:off x="640080" y="6446520"/>
-            <a:ext cx="8686800" cy="292608"/>
-          </a:xfrm>
-          <a:prstGeom prst="rect">
-            <a:avLst/>
-          </a:prstGeom>
-          <a:noFill/>
-          <a:ln/>
-        </p:spPr>
-        <p:txBody>
-          <a:bodyPr wrap="square" lIns="0" tIns="0" rIns="0" bIns="0" rtlCol="0" anchor="ctr"/>
-          <a:lstStyle/>
-          <a:p>
-            <a:pPr algn="l" indent="0" marL="0">
-              <a:buNone/>
-            </a:pPr>
-            <a:r>
-              <a:rPr lang="en-US" sz="900" dirty="0">
-                <a:solidFill>
-                  <a:srgbClr val="5D5D72"/>
-                </a:solidFill>
-                <a:latin typeface="Calibri" pitchFamily="34" charset="0"/>
-                <a:ea typeface="Calibri" pitchFamily="34" charset="-122"/>
-                <a:cs typeface="Calibri" pitchFamily="34" charset="-120"/>
-              </a:rPr>
-              <a:t>Usman Akram  •  COMSATS University Islamabad</a:t>
-            </a:r>
-            <a:endParaRPr lang="en-US" sz="900" dirty="0"/>
-          </a:p>
-        </p:txBody>
-      </p:sp>
-      <p:sp>
-        <p:nvSpPr>
-          <p:cNvPr id="8" name="Text 6"/>
-          <p:cNvSpPr txBox="1"/>
-          <p:nvPr/>
-        </p:nvSpPr>
-        <p:spPr>
-          <a:xfrm>
-            <a:off x="11155680" y="6446520"/>
-            <a:ext cx="457200" cy="292608"/>
-          </a:xfrm>
-          <a:prstGeom prst="rect">
-            <a:avLst/>
-          </a:prstGeom>
-          <a:noFill/>
-          <a:ln/>
-        </p:spPr>
-        <p:txBody>
-          <a:bodyPr wrap="square" lIns="0" tIns="0" rIns="0" bIns="0" rtlCol="0" anchor="ctr"/>
-          <a:lstStyle/>
-          <a:p>
-            <a:pPr algn="r" indent="0" marL="0">
-              <a:buNone/>
-            </a:pPr>
-            <a:r>
-              <a:rPr lang="en-US" sz="900" dirty="0">
-                <a:solidFill>
-                  <a:srgbClr val="5D5D72"/>
-                </a:solidFill>
-                <a:latin typeface="Calibri" pitchFamily="34" charset="0"/>
-                <a:ea typeface="Calibri" pitchFamily="34" charset="-122"/>
-                <a:cs typeface="Calibri" pitchFamily="34" charset="-120"/>
-              </a:rPr>
-              <a:t>23</a:t>
-            </a:r>
-            <a:endParaRPr lang="en-US" sz="900" dirty="0"/>
+          <p:cNvPr id="9" name="cuinotes-footer-mark"/>
+          <p:cNvSpPr txBox="1"/>
+          <p:nvPr/>
+        </p:nvSpPr>
+        <p:spPr>
+          <a:xfrm>
+            <a:off x="9951720" y="6455664"/>
+            <a:ext cx="2011680" cy="292608"/>
+          </a:xfrm>
+          <a:prstGeom prst="rect">
+            <a:avLst/>
+          </a:prstGeom>
+          <a:noFill/>
+        </p:spPr>
+        <p:txBody>
+          <a:bodyPr wrap="none" lIns="0" rIns="0" tIns="0" bIns="0">
+            <a:spAutoFit/>
+          </a:bodyPr>
+          <a:lstStyle/>
+          <a:p>
+            <a:pPr algn="r"/>
+            <a:r>
+              <a:rPr sz="1000">
+                <a:solidFill>
+                  <a:srgbClr val="8A939B"/>
+                </a:solidFill>
+                <a:hlinkClick r:id="rId3"/>
+              </a:rPr>
+              <a:t>cuinotes.com</a:t>
+            </a:r>
+            <a:r>
+              <a:rPr sz="1000">
+                <a:solidFill>
+                  <a:srgbClr val="8A939B"/>
+                </a:solidFill>
+              </a:rPr>
+              <a:t>  ·  23</a:t>
+            </a:r>
           </a:p>
         </p:txBody>
       </p:sp>
@@ -12564,6 +12192,10 @@
           </a:solidFill>
           <a:ln/>
         </p:spPr>
+        <p:txBody>
+          <a:bodyPr/>
+          <a:p/>
+        </p:txBody>
       </p:sp>
       <p:sp>
         <p:nvSpPr>
@@ -12662,6 +12294,10 @@
           </a:solidFill>
           <a:ln/>
         </p:spPr>
+        <p:txBody>
+          <a:bodyPr/>
+          <a:p/>
+        </p:txBody>
       </p:sp>
       <p:sp>
         <p:nvSpPr>
@@ -12760,6 +12396,10 @@
           </a:solidFill>
           <a:ln/>
         </p:spPr>
+        <p:txBody>
+          <a:bodyPr/>
+          <a:p/>
+        </p:txBody>
       </p:sp>
       <p:sp>
         <p:nvSpPr>
@@ -12841,79 +12481,44 @@
       </p:sp>
       <p:sp>
         <p:nvSpPr>
-          <p:cNvPr id="13" name="Text 11"/>
-          <p:cNvSpPr txBox="1"/>
-          <p:nvPr/>
-        </p:nvSpPr>
-        <p:spPr>
-          <a:xfrm>
-            <a:off x="640080" y="6446520"/>
-            <a:ext cx="8686800" cy="292608"/>
-          </a:xfrm>
-          <a:prstGeom prst="rect">
-            <a:avLst/>
-          </a:prstGeom>
-          <a:noFill/>
-          <a:ln/>
-        </p:spPr>
-        <p:txBody>
-          <a:bodyPr wrap="square" lIns="0" tIns="0" rIns="0" bIns="0" rtlCol="0" anchor="ctr"/>
-          <a:lstStyle/>
-          <a:p>
-            <a:pPr algn="l" indent="0" marL="0">
-              <a:buNone/>
-            </a:pPr>
-            <a:r>
-              <a:rPr lang="en-US" sz="900" dirty="0">
-                <a:solidFill>
-                  <a:srgbClr val="5D5D72"/>
-                </a:solidFill>
-                <a:latin typeface="Calibri" pitchFamily="34" charset="0"/>
-                <a:ea typeface="Calibri" pitchFamily="34" charset="-122"/>
-                <a:cs typeface="Calibri" pitchFamily="34" charset="-120"/>
-              </a:rPr>
-              <a:t>Usman Akram  •  COMSATS University Islamabad</a:t>
-            </a:r>
-            <a:endParaRPr lang="en-US" sz="900" dirty="0"/>
-          </a:p>
-        </p:txBody>
-      </p:sp>
-      <p:sp>
-        <p:nvSpPr>
-          <p:cNvPr id="14" name="Text 12"/>
-          <p:cNvSpPr txBox="1"/>
-          <p:nvPr/>
-        </p:nvSpPr>
-        <p:spPr>
-          <a:xfrm>
-            <a:off x="11155680" y="6446520"/>
-            <a:ext cx="457200" cy="292608"/>
-          </a:xfrm>
-          <a:prstGeom prst="rect">
-            <a:avLst/>
-          </a:prstGeom>
-          <a:noFill/>
-          <a:ln/>
-        </p:spPr>
-        <p:txBody>
-          <a:bodyPr wrap="square" lIns="0" tIns="0" rIns="0" bIns="0" rtlCol="0" anchor="ctr"/>
-          <a:lstStyle/>
-          <a:p>
-            <a:pPr algn="r" indent="0" marL="0">
-              <a:buNone/>
-            </a:pPr>
-            <a:r>
-              <a:rPr lang="en-US" sz="900" dirty="0">
-                <a:solidFill>
-                  <a:srgbClr val="5D5D72"/>
-                </a:solidFill>
-                <a:latin typeface="Calibri" pitchFamily="34" charset="0"/>
-                <a:ea typeface="Calibri" pitchFamily="34" charset="-122"/>
-                <a:cs typeface="Calibri" pitchFamily="34" charset="-120"/>
-              </a:rPr>
-              <a:t>24</a:t>
-            </a:r>
-            <a:endParaRPr lang="en-US" sz="900" dirty="0"/>
+          <p:cNvPr id="15" name="cuinotes-footer-mark"/>
+          <p:cNvSpPr txBox="1"/>
+          <p:nvPr/>
+        </p:nvSpPr>
+        <p:spPr>
+          <a:xfrm>
+            <a:off x="9951720" y="6455664"/>
+            <a:ext cx="2011680" cy="292608"/>
+          </a:xfrm>
+          <a:prstGeom prst="rect">
+            <a:avLst/>
+          </a:prstGeom>
+          <a:noFill/>
+        </p:spPr>
+        <p:txBody>
+          <a:bodyPr wrap="none" lIns="0" rIns="0" tIns="0" bIns="0">
+            <a:spAutoFit/>
+          </a:bodyPr>
+          <a:lstStyle/>
+          <a:p>
+            <a:pPr algn="r"/>
+            <a:r>
+              <a:rPr sz="1000">
+                <a:solidFill>
+                  <a:srgbClr val="8A939B"/>
+                </a:solidFill>
+                <a:hlinkClick r:id="rId3"/>
+              </a:rPr>
+              <a:t>cuinotes.com</a:t>
+            </a:r>
+            <a:r>
+              <a:rPr sz="1000">
+                <a:solidFill>
+                  <a:srgbClr val="8A939B"/>
+                </a:solidFill>
+              </a:rPr>
+              <a:t>  ·  24</a:t>
+            </a:r>
           </a:p>
         </p:txBody>
       </p:sp>
@@ -13050,6 +12655,10 @@
             <a:tailEnd type="triangle"/>
           </a:ln>
         </p:spPr>
+        <p:txBody>
+          <a:bodyPr/>
+          <a:p/>
+        </p:txBody>
       </p:sp>
       <p:sp>
         <p:nvSpPr>
@@ -13074,6 +12683,10 @@
             <a:tailEnd type="triangle"/>
           </a:ln>
         </p:spPr>
+        <p:txBody>
+          <a:bodyPr/>
+          <a:p/>
+        </p:txBody>
       </p:sp>
       <p:sp>
         <p:nvSpPr>
@@ -13098,6 +12711,10 @@
             <a:tailEnd type="triangle"/>
           </a:ln>
         </p:spPr>
+        <p:txBody>
+          <a:bodyPr/>
+          <a:p/>
+        </p:txBody>
       </p:sp>
       <p:sp>
         <p:nvSpPr>
@@ -13118,6 +12735,10 @@
           </a:solidFill>
           <a:ln/>
         </p:spPr>
+        <p:txBody>
+          <a:bodyPr/>
+          <a:p/>
+        </p:txBody>
       </p:sp>
       <p:sp>
         <p:nvSpPr>
@@ -13180,6 +12801,10 @@
           </a:solidFill>
           <a:ln/>
         </p:spPr>
+        <p:txBody>
+          <a:bodyPr/>
+          <a:p/>
+        </p:txBody>
       </p:sp>
       <p:sp>
         <p:nvSpPr>
@@ -13262,6 +12887,10 @@
           </a:solidFill>
           <a:ln/>
         </p:spPr>
+        <p:txBody>
+          <a:bodyPr/>
+          <a:p/>
+        </p:txBody>
       </p:sp>
       <p:sp>
         <p:nvSpPr>
@@ -13344,6 +12973,10 @@
           </a:solidFill>
           <a:ln/>
         </p:spPr>
+        <p:txBody>
+          <a:bodyPr/>
+          <a:p/>
+        </p:txBody>
       </p:sp>
       <p:sp>
         <p:nvSpPr>
@@ -13448,79 +13081,44 @@
       </p:sp>
       <p:sp>
         <p:nvSpPr>
-          <p:cNvPr id="16" name="Text 14"/>
-          <p:cNvSpPr txBox="1"/>
-          <p:nvPr/>
-        </p:nvSpPr>
-        <p:spPr>
-          <a:xfrm>
-            <a:off x="640080" y="6446520"/>
-            <a:ext cx="8686800" cy="292608"/>
-          </a:xfrm>
-          <a:prstGeom prst="rect">
-            <a:avLst/>
-          </a:prstGeom>
-          <a:noFill/>
-          <a:ln/>
-        </p:spPr>
-        <p:txBody>
-          <a:bodyPr wrap="square" lIns="0" tIns="0" rIns="0" bIns="0" rtlCol="0" anchor="ctr"/>
-          <a:lstStyle/>
-          <a:p>
-            <a:pPr algn="l" indent="0" marL="0">
-              <a:buNone/>
-            </a:pPr>
-            <a:r>
-              <a:rPr lang="en-US" sz="900" dirty="0">
-                <a:solidFill>
-                  <a:srgbClr val="5D5D72"/>
-                </a:solidFill>
-                <a:latin typeface="Calibri" pitchFamily="34" charset="0"/>
-                <a:ea typeface="Calibri" pitchFamily="34" charset="-122"/>
-                <a:cs typeface="Calibri" pitchFamily="34" charset="-120"/>
-              </a:rPr>
-              <a:t>Usman Akram  •  COMSATS University Islamabad</a:t>
-            </a:r>
-            <a:endParaRPr lang="en-US" sz="900" dirty="0"/>
-          </a:p>
-        </p:txBody>
-      </p:sp>
-      <p:sp>
-        <p:nvSpPr>
-          <p:cNvPr id="17" name="Text 15"/>
-          <p:cNvSpPr txBox="1"/>
-          <p:nvPr/>
-        </p:nvSpPr>
-        <p:spPr>
-          <a:xfrm>
-            <a:off x="11155680" y="6446520"/>
-            <a:ext cx="457200" cy="292608"/>
-          </a:xfrm>
-          <a:prstGeom prst="rect">
-            <a:avLst/>
-          </a:prstGeom>
-          <a:noFill/>
-          <a:ln/>
-        </p:spPr>
-        <p:txBody>
-          <a:bodyPr wrap="square" lIns="0" tIns="0" rIns="0" bIns="0" rtlCol="0" anchor="ctr"/>
-          <a:lstStyle/>
-          <a:p>
-            <a:pPr algn="r" indent="0" marL="0">
-              <a:buNone/>
-            </a:pPr>
-            <a:r>
-              <a:rPr lang="en-US" sz="900" dirty="0">
-                <a:solidFill>
-                  <a:srgbClr val="5D5D72"/>
-                </a:solidFill>
-                <a:latin typeface="Calibri" pitchFamily="34" charset="0"/>
-                <a:ea typeface="Calibri" pitchFamily="34" charset="-122"/>
-                <a:cs typeface="Calibri" pitchFamily="34" charset="-120"/>
-              </a:rPr>
-              <a:t>25</a:t>
-            </a:r>
-            <a:endParaRPr lang="en-US" sz="900" dirty="0"/>
+          <p:cNvPr id="18" name="cuinotes-footer-mark"/>
+          <p:cNvSpPr txBox="1"/>
+          <p:nvPr/>
+        </p:nvSpPr>
+        <p:spPr>
+          <a:xfrm>
+            <a:off x="9951720" y="6455664"/>
+            <a:ext cx="2011680" cy="292608"/>
+          </a:xfrm>
+          <a:prstGeom prst="rect">
+            <a:avLst/>
+          </a:prstGeom>
+          <a:noFill/>
+        </p:spPr>
+        <p:txBody>
+          <a:bodyPr wrap="none" lIns="0" rIns="0" tIns="0" bIns="0">
+            <a:spAutoFit/>
+          </a:bodyPr>
+          <a:lstStyle/>
+          <a:p>
+            <a:pPr algn="r"/>
+            <a:r>
+              <a:rPr sz="1000">
+                <a:solidFill>
+                  <a:srgbClr val="8A939B"/>
+                </a:solidFill>
+                <a:hlinkClick r:id="rId3"/>
+              </a:rPr>
+              <a:t>cuinotes.com</a:t>
+            </a:r>
+            <a:r>
+              <a:rPr sz="1000">
+                <a:solidFill>
+                  <a:srgbClr val="8A939B"/>
+                </a:solidFill>
+              </a:rPr>
+              <a:t>  ·  25</a:t>
+            </a:r>
           </a:p>
         </p:txBody>
       </p:sp>
@@ -13660,6 +13258,10 @@
             <a:prstDash val="solid"/>
           </a:ln>
         </p:spPr>
+        <p:txBody>
+          <a:bodyPr/>
+          <a:p/>
+        </p:txBody>
       </p:sp>
       <p:sp>
         <p:nvSpPr>
@@ -13811,6 +13413,10 @@
             <a:prstDash val="solid"/>
           </a:ln>
         </p:spPr>
+        <p:txBody>
+          <a:bodyPr/>
+          <a:p/>
+        </p:txBody>
       </p:sp>
       <p:sp>
         <p:nvSpPr>
@@ -13962,6 +13568,10 @@
             <a:prstDash val="solid"/>
           </a:ln>
         </p:spPr>
+        <p:txBody>
+          <a:bodyPr/>
+          <a:p/>
+        </p:txBody>
       </p:sp>
       <p:sp>
         <p:nvSpPr>
@@ -14089,79 +13699,44 @@
       </p:sp>
       <p:sp>
         <p:nvSpPr>
-          <p:cNvPr id="13" name="Text 11"/>
-          <p:cNvSpPr txBox="1"/>
-          <p:nvPr/>
-        </p:nvSpPr>
-        <p:spPr>
-          <a:xfrm>
-            <a:off x="640080" y="6446520"/>
-            <a:ext cx="8686800" cy="292608"/>
-          </a:xfrm>
-          <a:prstGeom prst="rect">
-            <a:avLst/>
-          </a:prstGeom>
-          <a:noFill/>
-          <a:ln/>
-        </p:spPr>
-        <p:txBody>
-          <a:bodyPr wrap="square" lIns="0" tIns="0" rIns="0" bIns="0" rtlCol="0" anchor="ctr"/>
-          <a:lstStyle/>
-          <a:p>
-            <a:pPr algn="l" indent="0" marL="0">
-              <a:buNone/>
-            </a:pPr>
-            <a:r>
-              <a:rPr lang="en-US" sz="900" dirty="0">
-                <a:solidFill>
-                  <a:srgbClr val="5D5D72"/>
-                </a:solidFill>
-                <a:latin typeface="Calibri" pitchFamily="34" charset="0"/>
-                <a:ea typeface="Calibri" pitchFamily="34" charset="-122"/>
-                <a:cs typeface="Calibri" pitchFamily="34" charset="-120"/>
-              </a:rPr>
-              <a:t>Usman Akram  •  COMSATS University Islamabad</a:t>
-            </a:r>
-            <a:endParaRPr lang="en-US" sz="900" dirty="0"/>
-          </a:p>
-        </p:txBody>
-      </p:sp>
-      <p:sp>
-        <p:nvSpPr>
-          <p:cNvPr id="14" name="Text 12"/>
-          <p:cNvSpPr txBox="1"/>
-          <p:nvPr/>
-        </p:nvSpPr>
-        <p:spPr>
-          <a:xfrm>
-            <a:off x="11155680" y="6446520"/>
-            <a:ext cx="457200" cy="292608"/>
-          </a:xfrm>
-          <a:prstGeom prst="rect">
-            <a:avLst/>
-          </a:prstGeom>
-          <a:noFill/>
-          <a:ln/>
-        </p:spPr>
-        <p:txBody>
-          <a:bodyPr wrap="square" lIns="0" tIns="0" rIns="0" bIns="0" rtlCol="0" anchor="ctr"/>
-          <a:lstStyle/>
-          <a:p>
-            <a:pPr algn="r" indent="0" marL="0">
-              <a:buNone/>
-            </a:pPr>
-            <a:r>
-              <a:rPr lang="en-US" sz="900" dirty="0">
-                <a:solidFill>
-                  <a:srgbClr val="5D5D72"/>
-                </a:solidFill>
-                <a:latin typeface="Calibri" pitchFamily="34" charset="0"/>
-                <a:ea typeface="Calibri" pitchFamily="34" charset="-122"/>
-                <a:cs typeface="Calibri" pitchFamily="34" charset="-120"/>
-              </a:rPr>
-              <a:t>26</a:t>
-            </a:r>
-            <a:endParaRPr lang="en-US" sz="900" dirty="0"/>
+          <p:cNvPr id="15" name="cuinotes-footer-mark"/>
+          <p:cNvSpPr txBox="1"/>
+          <p:nvPr/>
+        </p:nvSpPr>
+        <p:spPr>
+          <a:xfrm>
+            <a:off x="9951720" y="6455664"/>
+            <a:ext cx="2011680" cy="292608"/>
+          </a:xfrm>
+          <a:prstGeom prst="rect">
+            <a:avLst/>
+          </a:prstGeom>
+          <a:noFill/>
+        </p:spPr>
+        <p:txBody>
+          <a:bodyPr wrap="none" lIns="0" rIns="0" tIns="0" bIns="0">
+            <a:spAutoFit/>
+          </a:bodyPr>
+          <a:lstStyle/>
+          <a:p>
+            <a:pPr algn="r"/>
+            <a:r>
+              <a:rPr sz="1000">
+                <a:solidFill>
+                  <a:srgbClr val="8A939B"/>
+                </a:solidFill>
+                <a:hlinkClick r:id="rId3"/>
+              </a:rPr>
+              <a:t>cuinotes.com</a:t>
+            </a:r>
+            <a:r>
+              <a:rPr sz="1000">
+                <a:solidFill>
+                  <a:srgbClr val="8A939B"/>
+                </a:solidFill>
+              </a:rPr>
+              <a:t>  ·  26</a:t>
+            </a:r>
           </a:p>
         </p:txBody>
       </p:sp>
@@ -14301,6 +13876,10 @@
             <a:prstDash val="solid"/>
           </a:ln>
         </p:spPr>
+        <p:txBody>
+          <a:bodyPr/>
+          <a:p/>
+        </p:txBody>
       </p:sp>
       <p:sp>
         <p:nvSpPr>
@@ -14382,79 +13961,44 @@
       </p:sp>
       <p:sp>
         <p:nvSpPr>
-          <p:cNvPr id="7" name="Text 5"/>
-          <p:cNvSpPr txBox="1"/>
-          <p:nvPr/>
-        </p:nvSpPr>
-        <p:spPr>
-          <a:xfrm>
-            <a:off x="640080" y="6446520"/>
-            <a:ext cx="8686800" cy="292608"/>
-          </a:xfrm>
-          <a:prstGeom prst="rect">
-            <a:avLst/>
-          </a:prstGeom>
-          <a:noFill/>
-          <a:ln/>
-        </p:spPr>
-        <p:txBody>
-          <a:bodyPr wrap="square" lIns="0" tIns="0" rIns="0" bIns="0" rtlCol="0" anchor="ctr"/>
-          <a:lstStyle/>
-          <a:p>
-            <a:pPr algn="l" indent="0" marL="0">
-              <a:buNone/>
-            </a:pPr>
-            <a:r>
-              <a:rPr lang="en-US" sz="900" dirty="0">
-                <a:solidFill>
-                  <a:srgbClr val="5D5D72"/>
-                </a:solidFill>
-                <a:latin typeface="Calibri" pitchFamily="34" charset="0"/>
-                <a:ea typeface="Calibri" pitchFamily="34" charset="-122"/>
-                <a:cs typeface="Calibri" pitchFamily="34" charset="-120"/>
-              </a:rPr>
-              <a:t>Usman Akram  •  COMSATS University Islamabad</a:t>
-            </a:r>
-            <a:endParaRPr lang="en-US" sz="900" dirty="0"/>
-          </a:p>
-        </p:txBody>
-      </p:sp>
-      <p:sp>
-        <p:nvSpPr>
-          <p:cNvPr id="8" name="Text 6"/>
-          <p:cNvSpPr txBox="1"/>
-          <p:nvPr/>
-        </p:nvSpPr>
-        <p:spPr>
-          <a:xfrm>
-            <a:off x="11155680" y="6446520"/>
-            <a:ext cx="457200" cy="292608"/>
-          </a:xfrm>
-          <a:prstGeom prst="rect">
-            <a:avLst/>
-          </a:prstGeom>
-          <a:noFill/>
-          <a:ln/>
-        </p:spPr>
-        <p:txBody>
-          <a:bodyPr wrap="square" lIns="0" tIns="0" rIns="0" bIns="0" rtlCol="0" anchor="ctr"/>
-          <a:lstStyle/>
-          <a:p>
-            <a:pPr algn="r" indent="0" marL="0">
-              <a:buNone/>
-            </a:pPr>
-            <a:r>
-              <a:rPr lang="en-US" sz="900" dirty="0">
-                <a:solidFill>
-                  <a:srgbClr val="5D5D72"/>
-                </a:solidFill>
-                <a:latin typeface="Calibri" pitchFamily="34" charset="0"/>
-                <a:ea typeface="Calibri" pitchFamily="34" charset="-122"/>
-                <a:cs typeface="Calibri" pitchFamily="34" charset="-120"/>
-              </a:rPr>
-              <a:t>27</a:t>
-            </a:r>
-            <a:endParaRPr lang="en-US" sz="900" dirty="0"/>
+          <p:cNvPr id="9" name="cuinotes-footer-mark"/>
+          <p:cNvSpPr txBox="1"/>
+          <p:nvPr/>
+        </p:nvSpPr>
+        <p:spPr>
+          <a:xfrm>
+            <a:off x="9951720" y="6455664"/>
+            <a:ext cx="2011680" cy="292608"/>
+          </a:xfrm>
+          <a:prstGeom prst="rect">
+            <a:avLst/>
+          </a:prstGeom>
+          <a:noFill/>
+        </p:spPr>
+        <p:txBody>
+          <a:bodyPr wrap="none" lIns="0" rIns="0" tIns="0" bIns="0">
+            <a:spAutoFit/>
+          </a:bodyPr>
+          <a:lstStyle/>
+          <a:p>
+            <a:pPr algn="r"/>
+            <a:r>
+              <a:rPr sz="1000">
+                <a:solidFill>
+                  <a:srgbClr val="8A939B"/>
+                </a:solidFill>
+                <a:hlinkClick r:id="rId3"/>
+              </a:rPr>
+              <a:t>cuinotes.com</a:t>
+            </a:r>
+            <a:r>
+              <a:rPr sz="1000">
+                <a:solidFill>
+                  <a:srgbClr val="8A939B"/>
+                </a:solidFill>
+              </a:rPr>
+              <a:t>  ·  27</a:t>
+            </a:r>
           </a:p>
         </p:txBody>
       </p:sp>
@@ -14587,6 +14131,10 @@
           </a:solidFill>
           <a:ln/>
         </p:spPr>
+        <p:txBody>
+          <a:bodyPr/>
+          <a:p/>
+        </p:txBody>
       </p:sp>
       <p:sp>
         <p:nvSpPr>
@@ -14685,6 +14233,10 @@
           </a:solidFill>
           <a:ln/>
         </p:spPr>
+        <p:txBody>
+          <a:bodyPr/>
+          <a:p/>
+        </p:txBody>
       </p:sp>
       <p:sp>
         <p:nvSpPr>
@@ -14783,6 +14335,10 @@
           </a:solidFill>
           <a:ln/>
         </p:spPr>
+        <p:txBody>
+          <a:bodyPr/>
+          <a:p/>
+        </p:txBody>
       </p:sp>
       <p:sp>
         <p:nvSpPr>
@@ -14881,6 +14437,10 @@
           </a:solidFill>
           <a:ln/>
         </p:spPr>
+        <p:txBody>
+          <a:bodyPr/>
+          <a:p/>
+        </p:txBody>
       </p:sp>
       <p:sp>
         <p:nvSpPr>
@@ -14979,6 +14539,10 @@
           </a:solidFill>
           <a:ln/>
         </p:spPr>
+        <p:txBody>
+          <a:bodyPr/>
+          <a:p/>
+        </p:txBody>
       </p:sp>
       <p:sp>
         <p:nvSpPr>
@@ -15077,6 +14641,10 @@
           </a:solidFill>
           <a:ln/>
         </p:spPr>
+        <p:txBody>
+          <a:bodyPr/>
+          <a:p/>
+        </p:txBody>
       </p:sp>
       <p:sp>
         <p:nvSpPr>
@@ -15158,79 +14726,44 @@
       </p:sp>
       <p:sp>
         <p:nvSpPr>
-          <p:cNvPr id="22" name="Text 20"/>
-          <p:cNvSpPr txBox="1"/>
-          <p:nvPr/>
-        </p:nvSpPr>
-        <p:spPr>
-          <a:xfrm>
-            <a:off x="640080" y="6446520"/>
-            <a:ext cx="8686800" cy="292608"/>
-          </a:xfrm>
-          <a:prstGeom prst="rect">
-            <a:avLst/>
-          </a:prstGeom>
-          <a:noFill/>
-          <a:ln/>
-        </p:spPr>
-        <p:txBody>
-          <a:bodyPr wrap="square" lIns="0" tIns="0" rIns="0" bIns="0" rtlCol="0" anchor="ctr"/>
-          <a:lstStyle/>
-          <a:p>
-            <a:pPr algn="l" indent="0" marL="0">
-              <a:buNone/>
-            </a:pPr>
-            <a:r>
-              <a:rPr lang="en-US" sz="900" dirty="0">
-                <a:solidFill>
-                  <a:srgbClr val="9AA3D8"/>
-                </a:solidFill>
-                <a:latin typeface="Calibri" pitchFamily="34" charset="0"/>
-                <a:ea typeface="Calibri" pitchFamily="34" charset="-122"/>
-                <a:cs typeface="Calibri" pitchFamily="34" charset="-120"/>
-              </a:rPr>
-              <a:t>Usman Akram  •  COMSATS University Islamabad</a:t>
-            </a:r>
-            <a:endParaRPr lang="en-US" sz="900" dirty="0"/>
-          </a:p>
-        </p:txBody>
-      </p:sp>
-      <p:sp>
-        <p:nvSpPr>
-          <p:cNvPr id="23" name="Text 21"/>
-          <p:cNvSpPr txBox="1"/>
-          <p:nvPr/>
-        </p:nvSpPr>
-        <p:spPr>
-          <a:xfrm>
-            <a:off x="11155680" y="6446520"/>
-            <a:ext cx="457200" cy="292608"/>
-          </a:xfrm>
-          <a:prstGeom prst="rect">
-            <a:avLst/>
-          </a:prstGeom>
-          <a:noFill/>
-          <a:ln/>
-        </p:spPr>
-        <p:txBody>
-          <a:bodyPr wrap="square" lIns="0" tIns="0" rIns="0" bIns="0" rtlCol="0" anchor="ctr"/>
-          <a:lstStyle/>
-          <a:p>
-            <a:pPr algn="r" indent="0" marL="0">
-              <a:buNone/>
-            </a:pPr>
-            <a:r>
-              <a:rPr lang="en-US" sz="900" dirty="0">
-                <a:solidFill>
-                  <a:srgbClr val="9AA3D8"/>
-                </a:solidFill>
-                <a:latin typeface="Calibri" pitchFamily="34" charset="0"/>
-                <a:ea typeface="Calibri" pitchFamily="34" charset="-122"/>
-                <a:cs typeface="Calibri" pitchFamily="34" charset="-120"/>
-              </a:rPr>
-              <a:t>28</a:t>
-            </a:r>
-            <a:endParaRPr lang="en-US" sz="900" dirty="0"/>
+          <p:cNvPr id="24" name="cuinotes-footer-mark"/>
+          <p:cNvSpPr txBox="1"/>
+          <p:nvPr/>
+        </p:nvSpPr>
+        <p:spPr>
+          <a:xfrm>
+            <a:off x="9951720" y="6455664"/>
+            <a:ext cx="2011680" cy="292608"/>
+          </a:xfrm>
+          <a:prstGeom prst="rect">
+            <a:avLst/>
+          </a:prstGeom>
+          <a:noFill/>
+        </p:spPr>
+        <p:txBody>
+          <a:bodyPr wrap="none" lIns="0" rIns="0" tIns="0" bIns="0">
+            <a:spAutoFit/>
+          </a:bodyPr>
+          <a:lstStyle/>
+          <a:p>
+            <a:pPr algn="r"/>
+            <a:r>
+              <a:rPr sz="1000">
+                <a:solidFill>
+                  <a:srgbClr val="8A939B"/>
+                </a:solidFill>
+                <a:hlinkClick r:id="rId3"/>
+              </a:rPr>
+              <a:t>cuinotes.com</a:t>
+            </a:r>
+            <a:r>
+              <a:rPr sz="1000">
+                <a:solidFill>
+                  <a:srgbClr val="8A939B"/>
+                </a:solidFill>
+              </a:rPr>
+              <a:t>  ·  28</a:t>
+            </a:r>
           </a:p>
         </p:txBody>
       </p:sp>
@@ -15363,6 +14896,10 @@
           </a:solidFill>
           <a:ln/>
         </p:spPr>
+        <p:txBody>
+          <a:bodyPr/>
+          <a:p/>
+        </p:txBody>
       </p:sp>
       <p:sp>
         <p:nvSpPr>
@@ -15461,6 +14998,10 @@
           </a:solidFill>
           <a:ln/>
         </p:spPr>
+        <p:txBody>
+          <a:bodyPr/>
+          <a:p/>
+        </p:txBody>
       </p:sp>
       <p:sp>
         <p:nvSpPr>
@@ -15559,6 +15100,10 @@
           </a:solidFill>
           <a:ln/>
         </p:spPr>
+        <p:txBody>
+          <a:bodyPr/>
+          <a:p/>
+        </p:txBody>
       </p:sp>
       <p:sp>
         <p:nvSpPr>
@@ -15640,79 +15185,44 @@
       </p:sp>
       <p:sp>
         <p:nvSpPr>
-          <p:cNvPr id="13" name="Text 11"/>
-          <p:cNvSpPr txBox="1"/>
-          <p:nvPr/>
-        </p:nvSpPr>
-        <p:spPr>
-          <a:xfrm>
-            <a:off x="640080" y="6446520"/>
-            <a:ext cx="8686800" cy="292608"/>
-          </a:xfrm>
-          <a:prstGeom prst="rect">
-            <a:avLst/>
-          </a:prstGeom>
-          <a:noFill/>
-          <a:ln/>
-        </p:spPr>
-        <p:txBody>
-          <a:bodyPr wrap="square" lIns="0" tIns="0" rIns="0" bIns="0" rtlCol="0" anchor="ctr"/>
-          <a:lstStyle/>
-          <a:p>
-            <a:pPr algn="l" indent="0" marL="0">
-              <a:buNone/>
-            </a:pPr>
-            <a:r>
-              <a:rPr lang="en-US" sz="900" dirty="0">
-                <a:solidFill>
-                  <a:srgbClr val="5D5D72"/>
-                </a:solidFill>
-                <a:latin typeface="Calibri" pitchFamily="34" charset="0"/>
-                <a:ea typeface="Calibri" pitchFamily="34" charset="-122"/>
-                <a:cs typeface="Calibri" pitchFamily="34" charset="-120"/>
-              </a:rPr>
-              <a:t>Usman Akram  •  COMSATS University Islamabad</a:t>
-            </a:r>
-            <a:endParaRPr lang="en-US" sz="900" dirty="0"/>
-          </a:p>
-        </p:txBody>
-      </p:sp>
-      <p:sp>
-        <p:nvSpPr>
-          <p:cNvPr id="14" name="Text 12"/>
-          <p:cNvSpPr txBox="1"/>
-          <p:nvPr/>
-        </p:nvSpPr>
-        <p:spPr>
-          <a:xfrm>
-            <a:off x="11155680" y="6446520"/>
-            <a:ext cx="457200" cy="292608"/>
-          </a:xfrm>
-          <a:prstGeom prst="rect">
-            <a:avLst/>
-          </a:prstGeom>
-          <a:noFill/>
-          <a:ln/>
-        </p:spPr>
-        <p:txBody>
-          <a:bodyPr wrap="square" lIns="0" tIns="0" rIns="0" bIns="0" rtlCol="0" anchor="ctr"/>
-          <a:lstStyle/>
-          <a:p>
-            <a:pPr algn="r" indent="0" marL="0">
-              <a:buNone/>
-            </a:pPr>
-            <a:r>
-              <a:rPr lang="en-US" sz="900" dirty="0">
-                <a:solidFill>
-                  <a:srgbClr val="5D5D72"/>
-                </a:solidFill>
-                <a:latin typeface="Calibri" pitchFamily="34" charset="0"/>
-                <a:ea typeface="Calibri" pitchFamily="34" charset="-122"/>
-                <a:cs typeface="Calibri" pitchFamily="34" charset="-120"/>
-              </a:rPr>
-              <a:t>3</a:t>
-            </a:r>
-            <a:endParaRPr lang="en-US" sz="900" dirty="0"/>
+          <p:cNvPr id="15" name="cuinotes-footer-mark"/>
+          <p:cNvSpPr txBox="1"/>
+          <p:nvPr/>
+        </p:nvSpPr>
+        <p:spPr>
+          <a:xfrm>
+            <a:off x="9951720" y="6455664"/>
+            <a:ext cx="2011680" cy="292608"/>
+          </a:xfrm>
+          <a:prstGeom prst="rect">
+            <a:avLst/>
+          </a:prstGeom>
+          <a:noFill/>
+        </p:spPr>
+        <p:txBody>
+          <a:bodyPr wrap="none" lIns="0" rIns="0" tIns="0" bIns="0">
+            <a:spAutoFit/>
+          </a:bodyPr>
+          <a:lstStyle/>
+          <a:p>
+            <a:pPr algn="r"/>
+            <a:r>
+              <a:rPr sz="1000">
+                <a:solidFill>
+                  <a:srgbClr val="8A939B"/>
+                </a:solidFill>
+                <a:hlinkClick r:id="rId3"/>
+              </a:rPr>
+              <a:t>cuinotes.com</a:t>
+            </a:r>
+            <a:r>
+              <a:rPr sz="1000">
+                <a:solidFill>
+                  <a:srgbClr val="8A939B"/>
+                </a:solidFill>
+              </a:rPr>
+              <a:t>  ·  3</a:t>
+            </a:r>
           </a:p>
         </p:txBody>
       </p:sp>
@@ -15845,6 +15355,10 @@
           </a:solidFill>
           <a:ln/>
         </p:spPr>
+        <p:txBody>
+          <a:bodyPr/>
+          <a:p/>
+        </p:txBody>
       </p:sp>
       <p:sp>
         <p:nvSpPr>
@@ -15943,6 +15457,10 @@
           </a:solidFill>
           <a:ln/>
         </p:spPr>
+        <p:txBody>
+          <a:bodyPr/>
+          <a:p/>
+        </p:txBody>
       </p:sp>
       <p:sp>
         <p:nvSpPr>
@@ -16041,6 +15559,10 @@
           </a:solidFill>
           <a:ln/>
         </p:spPr>
+        <p:txBody>
+          <a:bodyPr/>
+          <a:p/>
+        </p:txBody>
       </p:sp>
       <p:sp>
         <p:nvSpPr>
@@ -16122,79 +15644,44 @@
       </p:sp>
       <p:sp>
         <p:nvSpPr>
-          <p:cNvPr id="13" name="Text 11"/>
-          <p:cNvSpPr txBox="1"/>
-          <p:nvPr/>
-        </p:nvSpPr>
-        <p:spPr>
-          <a:xfrm>
-            <a:off x="640080" y="6446520"/>
-            <a:ext cx="8686800" cy="292608"/>
-          </a:xfrm>
-          <a:prstGeom prst="rect">
-            <a:avLst/>
-          </a:prstGeom>
-          <a:noFill/>
-          <a:ln/>
-        </p:spPr>
-        <p:txBody>
-          <a:bodyPr wrap="square" lIns="0" tIns="0" rIns="0" bIns="0" rtlCol="0" anchor="ctr"/>
-          <a:lstStyle/>
-          <a:p>
-            <a:pPr algn="l" indent="0" marL="0">
-              <a:buNone/>
-            </a:pPr>
-            <a:r>
-              <a:rPr lang="en-US" sz="900" dirty="0">
-                <a:solidFill>
-                  <a:srgbClr val="5D5D72"/>
-                </a:solidFill>
-                <a:latin typeface="Calibri" pitchFamily="34" charset="0"/>
-                <a:ea typeface="Calibri" pitchFamily="34" charset="-122"/>
-                <a:cs typeface="Calibri" pitchFamily="34" charset="-120"/>
-              </a:rPr>
-              <a:t>Usman Akram  •  COMSATS University Islamabad</a:t>
-            </a:r>
-            <a:endParaRPr lang="en-US" sz="900" dirty="0"/>
-          </a:p>
-        </p:txBody>
-      </p:sp>
-      <p:sp>
-        <p:nvSpPr>
-          <p:cNvPr id="14" name="Text 12"/>
-          <p:cNvSpPr txBox="1"/>
-          <p:nvPr/>
-        </p:nvSpPr>
-        <p:spPr>
-          <a:xfrm>
-            <a:off x="11155680" y="6446520"/>
-            <a:ext cx="457200" cy="292608"/>
-          </a:xfrm>
-          <a:prstGeom prst="rect">
-            <a:avLst/>
-          </a:prstGeom>
-          <a:noFill/>
-          <a:ln/>
-        </p:spPr>
-        <p:txBody>
-          <a:bodyPr wrap="square" lIns="0" tIns="0" rIns="0" bIns="0" rtlCol="0" anchor="ctr"/>
-          <a:lstStyle/>
-          <a:p>
-            <a:pPr algn="r" indent="0" marL="0">
-              <a:buNone/>
-            </a:pPr>
-            <a:r>
-              <a:rPr lang="en-US" sz="900" dirty="0">
-                <a:solidFill>
-                  <a:srgbClr val="5D5D72"/>
-                </a:solidFill>
-                <a:latin typeface="Calibri" pitchFamily="34" charset="0"/>
-                <a:ea typeface="Calibri" pitchFamily="34" charset="-122"/>
-                <a:cs typeface="Calibri" pitchFamily="34" charset="-120"/>
-              </a:rPr>
-              <a:t>4</a:t>
-            </a:r>
-            <a:endParaRPr lang="en-US" sz="900" dirty="0"/>
+          <p:cNvPr id="15" name="cuinotes-footer-mark"/>
+          <p:cNvSpPr txBox="1"/>
+          <p:nvPr/>
+        </p:nvSpPr>
+        <p:spPr>
+          <a:xfrm>
+            <a:off x="9951720" y="6455664"/>
+            <a:ext cx="2011680" cy="292608"/>
+          </a:xfrm>
+          <a:prstGeom prst="rect">
+            <a:avLst/>
+          </a:prstGeom>
+          <a:noFill/>
+        </p:spPr>
+        <p:txBody>
+          <a:bodyPr wrap="none" lIns="0" rIns="0" tIns="0" bIns="0">
+            <a:spAutoFit/>
+          </a:bodyPr>
+          <a:lstStyle/>
+          <a:p>
+            <a:pPr algn="r"/>
+            <a:r>
+              <a:rPr sz="1000">
+                <a:solidFill>
+                  <a:srgbClr val="8A939B"/>
+                </a:solidFill>
+                <a:hlinkClick r:id="rId3"/>
+              </a:rPr>
+              <a:t>cuinotes.com</a:t>
+            </a:r>
+            <a:r>
+              <a:rPr sz="1000">
+                <a:solidFill>
+                  <a:srgbClr val="8A939B"/>
+                </a:solidFill>
+              </a:rPr>
+              <a:t>  ·  4</a:t>
+            </a:r>
           </a:p>
         </p:txBody>
       </p:sp>
@@ -16334,6 +15821,10 @@
             <a:prstDash val="solid"/>
           </a:ln>
         </p:spPr>
+        <p:txBody>
+          <a:bodyPr/>
+          <a:p/>
+        </p:txBody>
       </p:sp>
       <p:sp>
         <p:nvSpPr>
@@ -16415,79 +15906,44 @@
       </p:sp>
       <p:sp>
         <p:nvSpPr>
-          <p:cNvPr id="7" name="Text 5"/>
-          <p:cNvSpPr txBox="1"/>
-          <p:nvPr/>
-        </p:nvSpPr>
-        <p:spPr>
-          <a:xfrm>
-            <a:off x="640080" y="6446520"/>
-            <a:ext cx="8686800" cy="292608"/>
-          </a:xfrm>
-          <a:prstGeom prst="rect">
-            <a:avLst/>
-          </a:prstGeom>
-          <a:noFill/>
-          <a:ln/>
-        </p:spPr>
-        <p:txBody>
-          <a:bodyPr wrap="square" lIns="0" tIns="0" rIns="0" bIns="0" rtlCol="0" anchor="ctr"/>
-          <a:lstStyle/>
-          <a:p>
-            <a:pPr algn="l" indent="0" marL="0">
-              <a:buNone/>
-            </a:pPr>
-            <a:r>
-              <a:rPr lang="en-US" sz="900" dirty="0">
-                <a:solidFill>
-                  <a:srgbClr val="5D5D72"/>
-                </a:solidFill>
-                <a:latin typeface="Calibri" pitchFamily="34" charset="0"/>
-                <a:ea typeface="Calibri" pitchFamily="34" charset="-122"/>
-                <a:cs typeface="Calibri" pitchFamily="34" charset="-120"/>
-              </a:rPr>
-              <a:t>Usman Akram  •  COMSATS University Islamabad</a:t>
-            </a:r>
-            <a:endParaRPr lang="en-US" sz="900" dirty="0"/>
-          </a:p>
-        </p:txBody>
-      </p:sp>
-      <p:sp>
-        <p:nvSpPr>
-          <p:cNvPr id="8" name="Text 6"/>
-          <p:cNvSpPr txBox="1"/>
-          <p:nvPr/>
-        </p:nvSpPr>
-        <p:spPr>
-          <a:xfrm>
-            <a:off x="11155680" y="6446520"/>
-            <a:ext cx="457200" cy="292608"/>
-          </a:xfrm>
-          <a:prstGeom prst="rect">
-            <a:avLst/>
-          </a:prstGeom>
-          <a:noFill/>
-          <a:ln/>
-        </p:spPr>
-        <p:txBody>
-          <a:bodyPr wrap="square" lIns="0" tIns="0" rIns="0" bIns="0" rtlCol="0" anchor="ctr"/>
-          <a:lstStyle/>
-          <a:p>
-            <a:pPr algn="r" indent="0" marL="0">
-              <a:buNone/>
-            </a:pPr>
-            <a:r>
-              <a:rPr lang="en-US" sz="900" dirty="0">
-                <a:solidFill>
-                  <a:srgbClr val="5D5D72"/>
-                </a:solidFill>
-                <a:latin typeface="Calibri" pitchFamily="34" charset="0"/>
-                <a:ea typeface="Calibri" pitchFamily="34" charset="-122"/>
-                <a:cs typeface="Calibri" pitchFamily="34" charset="-120"/>
-              </a:rPr>
-              <a:t>5</a:t>
-            </a:r>
-            <a:endParaRPr lang="en-US" sz="900" dirty="0"/>
+          <p:cNvPr id="9" name="cuinotes-footer-mark"/>
+          <p:cNvSpPr txBox="1"/>
+          <p:nvPr/>
+        </p:nvSpPr>
+        <p:spPr>
+          <a:xfrm>
+            <a:off x="9951720" y="6455664"/>
+            <a:ext cx="2011680" cy="292608"/>
+          </a:xfrm>
+          <a:prstGeom prst="rect">
+            <a:avLst/>
+          </a:prstGeom>
+          <a:noFill/>
+        </p:spPr>
+        <p:txBody>
+          <a:bodyPr wrap="none" lIns="0" rIns="0" tIns="0" bIns="0">
+            <a:spAutoFit/>
+          </a:bodyPr>
+          <a:lstStyle/>
+          <a:p>
+            <a:pPr algn="r"/>
+            <a:r>
+              <a:rPr sz="1000">
+                <a:solidFill>
+                  <a:srgbClr val="8A939B"/>
+                </a:solidFill>
+                <a:hlinkClick r:id="rId3"/>
+              </a:rPr>
+              <a:t>cuinotes.com</a:t>
+            </a:r>
+            <a:r>
+              <a:rPr sz="1000">
+                <a:solidFill>
+                  <a:srgbClr val="8A939B"/>
+                </a:solidFill>
+              </a:rPr>
+              <a:t>  ·  5</a:t>
+            </a:r>
           </a:p>
         </p:txBody>
       </p:sp>
@@ -16620,6 +16076,10 @@
           </a:solidFill>
           <a:ln/>
         </p:spPr>
+        <p:txBody>
+          <a:bodyPr/>
+          <a:p/>
+        </p:txBody>
       </p:sp>
       <p:sp>
         <p:nvSpPr>
@@ -16718,6 +16178,10 @@
           </a:solidFill>
           <a:ln/>
         </p:spPr>
+        <p:txBody>
+          <a:bodyPr/>
+          <a:p/>
+        </p:txBody>
       </p:sp>
       <p:sp>
         <p:nvSpPr>
@@ -16816,6 +16280,10 @@
           </a:solidFill>
           <a:ln/>
         </p:spPr>
+        <p:txBody>
+          <a:bodyPr/>
+          <a:p/>
+        </p:txBody>
       </p:sp>
       <p:sp>
         <p:nvSpPr>
@@ -16897,79 +16365,44 @@
       </p:sp>
       <p:sp>
         <p:nvSpPr>
-          <p:cNvPr id="13" name="Text 11"/>
-          <p:cNvSpPr txBox="1"/>
-          <p:nvPr/>
-        </p:nvSpPr>
-        <p:spPr>
-          <a:xfrm>
-            <a:off x="640080" y="6446520"/>
-            <a:ext cx="8686800" cy="292608"/>
-          </a:xfrm>
-          <a:prstGeom prst="rect">
-            <a:avLst/>
-          </a:prstGeom>
-          <a:noFill/>
-          <a:ln/>
-        </p:spPr>
-        <p:txBody>
-          <a:bodyPr wrap="square" lIns="0" tIns="0" rIns="0" bIns="0" rtlCol="0" anchor="ctr"/>
-          <a:lstStyle/>
-          <a:p>
-            <a:pPr algn="l" indent="0" marL="0">
-              <a:buNone/>
-            </a:pPr>
-            <a:r>
-              <a:rPr lang="en-US" sz="900" dirty="0">
-                <a:solidFill>
-                  <a:srgbClr val="5D5D72"/>
-                </a:solidFill>
-                <a:latin typeface="Calibri" pitchFamily="34" charset="0"/>
-                <a:ea typeface="Calibri" pitchFamily="34" charset="-122"/>
-                <a:cs typeface="Calibri" pitchFamily="34" charset="-120"/>
-              </a:rPr>
-              <a:t>Usman Akram  •  COMSATS University Islamabad</a:t>
-            </a:r>
-            <a:endParaRPr lang="en-US" sz="900" dirty="0"/>
-          </a:p>
-        </p:txBody>
-      </p:sp>
-      <p:sp>
-        <p:nvSpPr>
-          <p:cNvPr id="14" name="Text 12"/>
-          <p:cNvSpPr txBox="1"/>
-          <p:nvPr/>
-        </p:nvSpPr>
-        <p:spPr>
-          <a:xfrm>
-            <a:off x="11155680" y="6446520"/>
-            <a:ext cx="457200" cy="292608"/>
-          </a:xfrm>
-          <a:prstGeom prst="rect">
-            <a:avLst/>
-          </a:prstGeom>
-          <a:noFill/>
-          <a:ln/>
-        </p:spPr>
-        <p:txBody>
-          <a:bodyPr wrap="square" lIns="0" tIns="0" rIns="0" bIns="0" rtlCol="0" anchor="ctr"/>
-          <a:lstStyle/>
-          <a:p>
-            <a:pPr algn="r" indent="0" marL="0">
-              <a:buNone/>
-            </a:pPr>
-            <a:r>
-              <a:rPr lang="en-US" sz="900" dirty="0">
-                <a:solidFill>
-                  <a:srgbClr val="5D5D72"/>
-                </a:solidFill>
-                <a:latin typeface="Calibri" pitchFamily="34" charset="0"/>
-                <a:ea typeface="Calibri" pitchFamily="34" charset="-122"/>
-                <a:cs typeface="Calibri" pitchFamily="34" charset="-120"/>
-              </a:rPr>
-              <a:t>6</a:t>
-            </a:r>
-            <a:endParaRPr lang="en-US" sz="900" dirty="0"/>
+          <p:cNvPr id="15" name="cuinotes-footer-mark"/>
+          <p:cNvSpPr txBox="1"/>
+          <p:nvPr/>
+        </p:nvSpPr>
+        <p:spPr>
+          <a:xfrm>
+            <a:off x="9951720" y="6455664"/>
+            <a:ext cx="2011680" cy="292608"/>
+          </a:xfrm>
+          <a:prstGeom prst="rect">
+            <a:avLst/>
+          </a:prstGeom>
+          <a:noFill/>
+        </p:spPr>
+        <p:txBody>
+          <a:bodyPr wrap="none" lIns="0" rIns="0" tIns="0" bIns="0">
+            <a:spAutoFit/>
+          </a:bodyPr>
+          <a:lstStyle/>
+          <a:p>
+            <a:pPr algn="r"/>
+            <a:r>
+              <a:rPr sz="1000">
+                <a:solidFill>
+                  <a:srgbClr val="8A939B"/>
+                </a:solidFill>
+                <a:hlinkClick r:id="rId3"/>
+              </a:rPr>
+              <a:t>cuinotes.com</a:t>
+            </a:r>
+            <a:r>
+              <a:rPr sz="1000">
+                <a:solidFill>
+                  <a:srgbClr val="8A939B"/>
+                </a:solidFill>
+              </a:rPr>
+              <a:t>  ·  6</a:t>
+            </a:r>
           </a:p>
         </p:txBody>
       </p:sp>
@@ -18352,79 +17785,44 @@
       </p:graphicFrame>
       <p:sp>
         <p:nvSpPr>
-          <p:cNvPr id="5" name="Text 2"/>
-          <p:cNvSpPr txBox="1"/>
-          <p:nvPr/>
-        </p:nvSpPr>
-        <p:spPr>
-          <a:xfrm>
-            <a:off x="640080" y="6446520"/>
-            <a:ext cx="8686800" cy="292608"/>
-          </a:xfrm>
-          <a:prstGeom prst="rect">
-            <a:avLst/>
-          </a:prstGeom>
-          <a:noFill/>
-          <a:ln/>
-        </p:spPr>
-        <p:txBody>
-          <a:bodyPr wrap="square" lIns="0" tIns="0" rIns="0" bIns="0" rtlCol="0" anchor="ctr"/>
-          <a:lstStyle/>
-          <a:p>
-            <a:pPr algn="l" indent="0" marL="0">
-              <a:buNone/>
-            </a:pPr>
-            <a:r>
-              <a:rPr lang="en-US" sz="900" dirty="0">
-                <a:solidFill>
-                  <a:srgbClr val="5D5D72"/>
-                </a:solidFill>
-                <a:latin typeface="Calibri" pitchFamily="34" charset="0"/>
-                <a:ea typeface="Calibri" pitchFamily="34" charset="-122"/>
-                <a:cs typeface="Calibri" pitchFamily="34" charset="-120"/>
-              </a:rPr>
-              <a:t>Usman Akram  •  COMSATS University Islamabad</a:t>
-            </a:r>
-            <a:endParaRPr lang="en-US" sz="900" dirty="0"/>
-          </a:p>
-        </p:txBody>
-      </p:sp>
-      <p:sp>
-        <p:nvSpPr>
-          <p:cNvPr id="6" name="Text 3"/>
-          <p:cNvSpPr txBox="1"/>
-          <p:nvPr/>
-        </p:nvSpPr>
-        <p:spPr>
-          <a:xfrm>
-            <a:off x="11155680" y="6446520"/>
-            <a:ext cx="457200" cy="292608"/>
-          </a:xfrm>
-          <a:prstGeom prst="rect">
-            <a:avLst/>
-          </a:prstGeom>
-          <a:noFill/>
-          <a:ln/>
-        </p:spPr>
-        <p:txBody>
-          <a:bodyPr wrap="square" lIns="0" tIns="0" rIns="0" bIns="0" rtlCol="0" anchor="ctr"/>
-          <a:lstStyle/>
-          <a:p>
-            <a:pPr algn="r" indent="0" marL="0">
-              <a:buNone/>
-            </a:pPr>
-            <a:r>
-              <a:rPr lang="en-US" sz="900" dirty="0">
-                <a:solidFill>
-                  <a:srgbClr val="5D5D72"/>
-                </a:solidFill>
-                <a:latin typeface="Calibri" pitchFamily="34" charset="0"/>
-                <a:ea typeface="Calibri" pitchFamily="34" charset="-122"/>
-                <a:cs typeface="Calibri" pitchFamily="34" charset="-120"/>
-              </a:rPr>
-              <a:t>7</a:t>
-            </a:r>
-            <a:endParaRPr lang="en-US" sz="900" dirty="0"/>
+          <p:cNvPr id="9" name="cuinotes-footer-mark"/>
+          <p:cNvSpPr txBox="1"/>
+          <p:nvPr/>
+        </p:nvSpPr>
+        <p:spPr>
+          <a:xfrm>
+            <a:off x="9951720" y="6455664"/>
+            <a:ext cx="2011680" cy="292608"/>
+          </a:xfrm>
+          <a:prstGeom prst="rect">
+            <a:avLst/>
+          </a:prstGeom>
+          <a:noFill/>
+        </p:spPr>
+        <p:txBody>
+          <a:bodyPr wrap="none" lIns="0" rIns="0" tIns="0" bIns="0">
+            <a:spAutoFit/>
+          </a:bodyPr>
+          <a:lstStyle/>
+          <a:p>
+            <a:pPr algn="r"/>
+            <a:r>
+              <a:rPr sz="1000">
+                <a:solidFill>
+                  <a:srgbClr val="8A939B"/>
+                </a:solidFill>
+                <a:hlinkClick r:id="rId3"/>
+              </a:rPr>
+              <a:t>cuinotes.com</a:t>
+            </a:r>
+            <a:r>
+              <a:rPr sz="1000">
+                <a:solidFill>
+                  <a:srgbClr val="8A939B"/>
+                </a:solidFill>
+              </a:rPr>
+              <a:t>  ·  7</a:t>
+            </a:r>
           </a:p>
         </p:txBody>
       </p:sp>
@@ -18564,6 +17962,10 @@
             <a:prstDash val="solid"/>
           </a:ln>
         </p:spPr>
+        <p:txBody>
+          <a:bodyPr/>
+          <a:p/>
+        </p:txBody>
       </p:sp>
       <p:sp>
         <p:nvSpPr>
@@ -18645,79 +18047,44 @@
       </p:sp>
       <p:sp>
         <p:nvSpPr>
-          <p:cNvPr id="7" name="Text 5"/>
-          <p:cNvSpPr txBox="1"/>
-          <p:nvPr/>
-        </p:nvSpPr>
-        <p:spPr>
-          <a:xfrm>
-            <a:off x="640080" y="6446520"/>
-            <a:ext cx="8686800" cy="292608"/>
-          </a:xfrm>
-          <a:prstGeom prst="rect">
-            <a:avLst/>
-          </a:prstGeom>
-          <a:noFill/>
-          <a:ln/>
-        </p:spPr>
-        <p:txBody>
-          <a:bodyPr wrap="square" lIns="0" tIns="0" rIns="0" bIns="0" rtlCol="0" anchor="ctr"/>
-          <a:lstStyle/>
-          <a:p>
-            <a:pPr algn="l" indent="0" marL="0">
-              <a:buNone/>
-            </a:pPr>
-            <a:r>
-              <a:rPr lang="en-US" sz="900" dirty="0">
-                <a:solidFill>
-                  <a:srgbClr val="5D5D72"/>
-                </a:solidFill>
-                <a:latin typeface="Calibri" pitchFamily="34" charset="0"/>
-                <a:ea typeface="Calibri" pitchFamily="34" charset="-122"/>
-                <a:cs typeface="Calibri" pitchFamily="34" charset="-120"/>
-              </a:rPr>
-              <a:t>Usman Akram  •  COMSATS University Islamabad</a:t>
-            </a:r>
-            <a:endParaRPr lang="en-US" sz="900" dirty="0"/>
-          </a:p>
-        </p:txBody>
-      </p:sp>
-      <p:sp>
-        <p:nvSpPr>
-          <p:cNvPr id="8" name="Text 6"/>
-          <p:cNvSpPr txBox="1"/>
-          <p:nvPr/>
-        </p:nvSpPr>
-        <p:spPr>
-          <a:xfrm>
-            <a:off x="11155680" y="6446520"/>
-            <a:ext cx="457200" cy="292608"/>
-          </a:xfrm>
-          <a:prstGeom prst="rect">
-            <a:avLst/>
-          </a:prstGeom>
-          <a:noFill/>
-          <a:ln/>
-        </p:spPr>
-        <p:txBody>
-          <a:bodyPr wrap="square" lIns="0" tIns="0" rIns="0" bIns="0" rtlCol="0" anchor="ctr"/>
-          <a:lstStyle/>
-          <a:p>
-            <a:pPr algn="r" indent="0" marL="0">
-              <a:buNone/>
-            </a:pPr>
-            <a:r>
-              <a:rPr lang="en-US" sz="900" dirty="0">
-                <a:solidFill>
-                  <a:srgbClr val="5D5D72"/>
-                </a:solidFill>
-                <a:latin typeface="Calibri" pitchFamily="34" charset="0"/>
-                <a:ea typeface="Calibri" pitchFamily="34" charset="-122"/>
-                <a:cs typeface="Calibri" pitchFamily="34" charset="-120"/>
-              </a:rPr>
-              <a:t>8</a:t>
-            </a:r>
-            <a:endParaRPr lang="en-US" sz="900" dirty="0"/>
+          <p:cNvPr id="9" name="cuinotes-footer-mark"/>
+          <p:cNvSpPr txBox="1"/>
+          <p:nvPr/>
+        </p:nvSpPr>
+        <p:spPr>
+          <a:xfrm>
+            <a:off x="9951720" y="6455664"/>
+            <a:ext cx="2011680" cy="292608"/>
+          </a:xfrm>
+          <a:prstGeom prst="rect">
+            <a:avLst/>
+          </a:prstGeom>
+          <a:noFill/>
+        </p:spPr>
+        <p:txBody>
+          <a:bodyPr wrap="none" lIns="0" rIns="0" tIns="0" bIns="0">
+            <a:spAutoFit/>
+          </a:bodyPr>
+          <a:lstStyle/>
+          <a:p>
+            <a:pPr algn="r"/>
+            <a:r>
+              <a:rPr sz="1000">
+                <a:solidFill>
+                  <a:srgbClr val="8A939B"/>
+                </a:solidFill>
+                <a:hlinkClick r:id="rId3"/>
+              </a:rPr>
+              <a:t>cuinotes.com</a:t>
+            </a:r>
+            <a:r>
+              <a:rPr sz="1000">
+                <a:solidFill>
+                  <a:srgbClr val="8A939B"/>
+                </a:solidFill>
+              </a:rPr>
+              <a:t>  ·  8</a:t>
+            </a:r>
           </a:p>
         </p:txBody>
       </p:sp>
@@ -18852,6 +18219,10 @@
           </a:solidFill>
           <a:ln/>
         </p:spPr>
+        <p:txBody>
+          <a:bodyPr/>
+          <a:p/>
+        </p:txBody>
       </p:sp>
       <p:sp>
         <p:nvSpPr>
@@ -18932,6 +18303,10 @@
             <a:tailEnd type="triangle"/>
           </a:ln>
         </p:spPr>
+        <p:txBody>
+          <a:bodyPr/>
+          <a:p/>
+        </p:txBody>
       </p:sp>
       <p:sp>
         <p:nvSpPr>
@@ -18954,6 +18329,10 @@
           </a:solidFill>
           <a:ln/>
         </p:spPr>
+        <p:txBody>
+          <a:bodyPr/>
+          <a:p/>
+        </p:txBody>
       </p:sp>
       <p:sp>
         <p:nvSpPr>
@@ -19034,6 +18413,10 @@
             <a:tailEnd type="triangle"/>
           </a:ln>
         </p:spPr>
+        <p:txBody>
+          <a:bodyPr/>
+          <a:p/>
+        </p:txBody>
       </p:sp>
       <p:sp>
         <p:nvSpPr>
@@ -19056,6 +18439,10 @@
           </a:solidFill>
           <a:ln/>
         </p:spPr>
+        <p:txBody>
+          <a:bodyPr/>
+          <a:p/>
+        </p:txBody>
       </p:sp>
       <p:sp>
         <p:nvSpPr>
@@ -19136,6 +18523,10 @@
             <a:tailEnd type="triangle"/>
           </a:ln>
         </p:spPr>
+        <p:txBody>
+          <a:bodyPr/>
+          <a:p/>
+        </p:txBody>
       </p:sp>
       <p:sp>
         <p:nvSpPr>
@@ -19158,6 +18549,10 @@
           </a:solidFill>
           <a:ln/>
         </p:spPr>
+        <p:txBody>
+          <a:bodyPr/>
+          <a:p/>
+        </p:txBody>
       </p:sp>
       <p:sp>
         <p:nvSpPr>
@@ -19238,6 +18633,10 @@
             <a:tailEnd type="triangle"/>
           </a:ln>
         </p:spPr>
+        <p:txBody>
+          <a:bodyPr/>
+          <a:p/>
+        </p:txBody>
       </p:sp>
       <p:sp>
         <p:nvSpPr>
@@ -19260,6 +18659,10 @@
           </a:solidFill>
           <a:ln/>
         </p:spPr>
+        <p:txBody>
+          <a:bodyPr/>
+          <a:p/>
+        </p:txBody>
       </p:sp>
       <p:sp>
         <p:nvSpPr>
@@ -19340,6 +18743,10 @@
             <a:tailEnd type="triangle"/>
           </a:ln>
         </p:spPr>
+        <p:txBody>
+          <a:bodyPr/>
+          <a:p/>
+        </p:txBody>
       </p:sp>
       <p:sp>
         <p:nvSpPr>
@@ -19362,6 +18769,10 @@
           </a:solidFill>
           <a:ln/>
         </p:spPr>
+        <p:txBody>
+          <a:bodyPr/>
+          <a:p/>
+        </p:txBody>
       </p:sp>
       <p:sp>
         <p:nvSpPr>
@@ -19460,79 +18871,44 @@
       </p:sp>
       <p:sp>
         <p:nvSpPr>
-          <p:cNvPr id="22" name="Text 20"/>
-          <p:cNvSpPr txBox="1"/>
-          <p:nvPr/>
-        </p:nvSpPr>
-        <p:spPr>
-          <a:xfrm>
-            <a:off x="640080" y="6446520"/>
-            <a:ext cx="8686800" cy="292608"/>
-          </a:xfrm>
-          <a:prstGeom prst="rect">
-            <a:avLst/>
-          </a:prstGeom>
-          <a:noFill/>
-          <a:ln/>
-        </p:spPr>
-        <p:txBody>
-          <a:bodyPr wrap="square" lIns="0" tIns="0" rIns="0" bIns="0" rtlCol="0" anchor="ctr"/>
-          <a:lstStyle/>
-          <a:p>
-            <a:pPr algn="l" indent="0" marL="0">
-              <a:buNone/>
-            </a:pPr>
-            <a:r>
-              <a:rPr lang="en-US" sz="900" dirty="0">
-                <a:solidFill>
-                  <a:srgbClr val="5D5D72"/>
-                </a:solidFill>
-                <a:latin typeface="Calibri" pitchFamily="34" charset="0"/>
-                <a:ea typeface="Calibri" pitchFamily="34" charset="-122"/>
-                <a:cs typeface="Calibri" pitchFamily="34" charset="-120"/>
-              </a:rPr>
-              <a:t>Usman Akram  •  COMSATS University Islamabad</a:t>
-            </a:r>
-            <a:endParaRPr lang="en-US" sz="900" dirty="0"/>
-          </a:p>
-        </p:txBody>
-      </p:sp>
-      <p:sp>
-        <p:nvSpPr>
-          <p:cNvPr id="23" name="Text 21"/>
-          <p:cNvSpPr txBox="1"/>
-          <p:nvPr/>
-        </p:nvSpPr>
-        <p:spPr>
-          <a:xfrm>
-            <a:off x="11155680" y="6446520"/>
-            <a:ext cx="457200" cy="292608"/>
-          </a:xfrm>
-          <a:prstGeom prst="rect">
-            <a:avLst/>
-          </a:prstGeom>
-          <a:noFill/>
-          <a:ln/>
-        </p:spPr>
-        <p:txBody>
-          <a:bodyPr wrap="square" lIns="0" tIns="0" rIns="0" bIns="0" rtlCol="0" anchor="ctr"/>
-          <a:lstStyle/>
-          <a:p>
-            <a:pPr algn="r" indent="0" marL="0">
-              <a:buNone/>
-            </a:pPr>
-            <a:r>
-              <a:rPr lang="en-US" sz="900" dirty="0">
-                <a:solidFill>
-                  <a:srgbClr val="5D5D72"/>
-                </a:solidFill>
-                <a:latin typeface="Calibri" pitchFamily="34" charset="0"/>
-                <a:ea typeface="Calibri" pitchFamily="34" charset="-122"/>
-                <a:cs typeface="Calibri" pitchFamily="34" charset="-120"/>
-              </a:rPr>
-              <a:t>9</a:t>
-            </a:r>
-            <a:endParaRPr lang="en-US" sz="900" dirty="0"/>
+          <p:cNvPr id="24" name="cuinotes-footer-mark"/>
+          <p:cNvSpPr txBox="1"/>
+          <p:nvPr/>
+        </p:nvSpPr>
+        <p:spPr>
+          <a:xfrm>
+            <a:off x="9951720" y="6455664"/>
+            <a:ext cx="2011680" cy="292608"/>
+          </a:xfrm>
+          <a:prstGeom prst="rect">
+            <a:avLst/>
+          </a:prstGeom>
+          <a:noFill/>
+        </p:spPr>
+        <p:txBody>
+          <a:bodyPr wrap="none" lIns="0" rIns="0" tIns="0" bIns="0">
+            <a:spAutoFit/>
+          </a:bodyPr>
+          <a:lstStyle/>
+          <a:p>
+            <a:pPr algn="r"/>
+            <a:r>
+              <a:rPr sz="1000">
+                <a:solidFill>
+                  <a:srgbClr val="8A939B"/>
+                </a:solidFill>
+                <a:hlinkClick r:id="rId3"/>
+              </a:rPr>
+              <a:t>cuinotes.com</a:t>
+            </a:r>
+            <a:r>
+              <a:rPr sz="1000">
+                <a:solidFill>
+                  <a:srgbClr val="8A939B"/>
+                </a:solidFill>
+              </a:rPr>
+              <a:t>  ·  9</a:t>
+            </a:r>
           </a:p>
         </p:txBody>
       </p:sp>

--- a/slides/CSC336-Lecture-32-Domain-DNS-and-Deployment.pptx
+++ b/slides/CSC336-Lecture-32-Domain-DNS-and-Deployment.pptx
@@ -3984,9 +3984,13 @@
             </a:avLst>
           </a:prstGeom>
           <a:solidFill>
-            <a:srgbClr val="1E1E4C"/>
+            <a:srgbClr val="F7F8F9"/>
           </a:solidFill>
-          <a:ln/>
+          <a:ln w="9525">
+            <a:solidFill>
+              <a:srgbClr val="D0D5DD"/>
+            </a:solidFill>
+          </a:ln>
         </p:spPr>
         <p:txBody>
           <a:bodyPr/>
@@ -4023,7 +4027,7 @@
             <a:r>
               <a:rPr lang="en-US" sz="1400" dirty="0">
                 <a:solidFill>
-                  <a:srgbClr val="C9D3F5"/>
+                  <a:srgbClr val="1F2429"/>
                 </a:solidFill>
                 <a:latin typeface="Courier New" pitchFamily="34" charset="0"/>
                 <a:ea typeface="Courier New" pitchFamily="34" charset="-122"/>
@@ -4794,7 +4798,7 @@
         <p:spPr>
           <a:xfrm>
             <a:off x="640080" y="1965960"/>
-            <a:ext cx="10911535" cy="1554480"/>
+            <a:ext cx="10911535" cy="3657600"/>
           </a:xfrm>
           <a:prstGeom prst="roundRect">
             <a:avLst>
@@ -4825,7 +4829,7 @@
         <p:spPr>
           <a:xfrm>
             <a:off x="868680" y="2103120"/>
-            <a:ext cx="10454335" cy="274320"/>
+            <a:ext cx="10454335" cy="400000"/>
           </a:xfrm>
           <a:prstGeom prst="rect">
             <a:avLst/>
@@ -4841,7 +4845,7 @@
               <a:buNone/>
             </a:pPr>
             <a:r>
-              <a:rPr lang="en-US" sz="1000" b="1" spc="200" kern="0" dirty="0">
+              <a:rPr lang="en-US" sz="1800" b="1" spc="200" kern="0" dirty="0">
                 <a:solidFill>
                   <a:srgbClr val="1F7A46"/>
                 </a:solidFill>
@@ -4851,7 +4855,7 @@
               </a:rPr>
               <a:t>TIP</a:t>
             </a:r>
-            <a:endParaRPr lang="en-US" sz="1000" dirty="0"/>
+            <a:endParaRPr lang="en-US" sz="1800" dirty="0"/>
           </a:p>
         </p:txBody>
       </p:sp>
@@ -4863,24 +4867,24 @@
         </p:nvSpPr>
         <p:spPr>
           <a:xfrm>
-            <a:off x="868680" y="2404872"/>
-            <a:ext cx="10454335" cy="960120"/>
-          </a:xfrm>
-          <a:prstGeom prst="rect">
-            <a:avLst/>
-          </a:prstGeom>
-          <a:noFill/>
-          <a:ln/>
-        </p:spPr>
-        <p:txBody>
-          <a:bodyPr wrap="square" lIns="0" tIns="0" rIns="0" bIns="0" rtlCol="0" anchor="t"/>
+            <a:off x="868680" y="2795960"/>
+            <a:ext cx="10454335" cy="2500000"/>
+          </a:xfrm>
+          <a:prstGeom prst="rect">
+            <a:avLst/>
+          </a:prstGeom>
+          <a:noFill/>
+          <a:ln/>
+        </p:spPr>
+        <p:txBody>
+          <a:bodyPr wrap="square" lIns="0" tIns="0" rIns="0" bIns="0" rtlCol="0" anchor="ctr"/>
           <a:lstStyle/>
           <a:p>
             <a:pPr indent="0" marL="0">
               <a:buNone/>
             </a:pPr>
             <a:r>
-              <a:rPr lang="en-US" sz="1250" dirty="0">
+              <a:rPr lang="en-US" sz="2800" dirty="0">
                 <a:solidFill>
                   <a:srgbClr val="26262F"/>
                 </a:solidFill>
@@ -4890,7 +4894,7 @@
               </a:rPr>
               <a:t>If you know you're about to change a DNS record — e.g. moving your site to a new host — lower the TTL a day or two in advance, so resolvers pick up the new value quickly instead of serving a stale answer for hours.</a:t>
             </a:r>
-            <a:endParaRPr lang="en-US" sz="1250" dirty="0"/>
+            <a:endParaRPr lang="en-US" sz="2800" dirty="0"/>
           </a:p>
         </p:txBody>
       </p:sp>
@@ -9401,9 +9405,13 @@
             </a:avLst>
           </a:prstGeom>
           <a:solidFill>
-            <a:srgbClr val="1E1E4C"/>
+            <a:srgbClr val="F7F8F9"/>
           </a:solidFill>
-          <a:ln/>
+          <a:ln w="9525">
+            <a:solidFill>
+              <a:srgbClr val="D0D5DD"/>
+            </a:solidFill>
+          </a:ln>
         </p:spPr>
         <p:txBody>
           <a:bodyPr/>
@@ -9440,7 +9448,7 @@
             <a:r>
               <a:rPr lang="en-US" sz="1400" dirty="0">
                 <a:solidFill>
-                  <a:srgbClr val="C9D3F5"/>
+                  <a:srgbClr val="1F2429"/>
                 </a:solidFill>
                 <a:latin typeface="Courier New" pitchFamily="34" charset="0"/>
                 <a:ea typeface="Courier New" pitchFamily="34" charset="-122"/>
@@ -9460,7 +9468,7 @@
             <a:r>
               <a:rPr lang="en-US" sz="1400" dirty="0">
                 <a:solidFill>
-                  <a:srgbClr val="C9D3F5"/>
+                  <a:srgbClr val="1F2429"/>
                 </a:solidFill>
                 <a:latin typeface="Courier New" pitchFamily="34" charset="0"/>
                 <a:ea typeface="Courier New" pitchFamily="34" charset="-122"/>
@@ -9480,7 +9488,7 @@
             <a:r>
               <a:rPr lang="en-US" sz="1400" dirty="0">
                 <a:solidFill>
-                  <a:srgbClr val="C9D3F5"/>
+                  <a:srgbClr val="1F2429"/>
                 </a:solidFill>
                 <a:latin typeface="Courier New" pitchFamily="34" charset="0"/>
                 <a:ea typeface="Courier New" pitchFamily="34" charset="-122"/>
@@ -10262,9 +10270,13 @@
             </a:avLst>
           </a:prstGeom>
           <a:solidFill>
-            <a:srgbClr val="1E1E4C"/>
+            <a:srgbClr val="F7F8F9"/>
           </a:solidFill>
-          <a:ln/>
+          <a:ln w="9525">
+            <a:solidFill>
+              <a:srgbClr val="D0D5DD"/>
+            </a:solidFill>
+          </a:ln>
         </p:spPr>
         <p:txBody>
           <a:bodyPr/>
@@ -10301,7 +10313,7 @@
             <a:r>
               <a:rPr lang="en-US" sz="1400" dirty="0">
                 <a:solidFill>
-                  <a:srgbClr val="C9D3F5"/>
+                  <a:srgbClr val="1F2429"/>
                 </a:solidFill>
                 <a:latin typeface="Courier New" pitchFamily="34" charset="0"/>
                 <a:ea typeface="Courier New" pitchFamily="34" charset="-122"/>
@@ -10321,7 +10333,7 @@
             <a:r>
               <a:rPr lang="en-US" sz="1400" dirty="0">
                 <a:solidFill>
-                  <a:srgbClr val="C9D3F5"/>
+                  <a:srgbClr val="1F2429"/>
                 </a:solidFill>
                 <a:latin typeface="Courier New" pitchFamily="34" charset="0"/>
                 <a:ea typeface="Courier New" pitchFamily="34" charset="-122"/>
@@ -10341,7 +10353,7 @@
             <a:r>
               <a:rPr lang="en-US" sz="1400" dirty="0">
                 <a:solidFill>
-                  <a:srgbClr val="C9D3F5"/>
+                  <a:srgbClr val="1F2429"/>
                 </a:solidFill>
                 <a:latin typeface="Courier New" pitchFamily="34" charset="0"/>
                 <a:ea typeface="Courier New" pitchFamily="34" charset="-122"/>
@@ -10361,7 +10373,7 @@
             <a:r>
               <a:rPr lang="en-US" sz="1400" dirty="0">
                 <a:solidFill>
-                  <a:srgbClr val="C9D3F5"/>
+                  <a:srgbClr val="1F2429"/>
                 </a:solidFill>
                 <a:latin typeface="Courier New" pitchFamily="34" charset="0"/>
                 <a:ea typeface="Courier New" pitchFamily="34" charset="-122"/>
@@ -10381,7 +10393,7 @@
             <a:r>
               <a:rPr lang="en-US" sz="1400" dirty="0">
                 <a:solidFill>
-                  <a:srgbClr val="C9D3F5"/>
+                  <a:srgbClr val="1F2429"/>
                 </a:solidFill>
                 <a:latin typeface="Courier New" pitchFamily="34" charset="0"/>
                 <a:ea typeface="Courier New" pitchFamily="34" charset="-122"/>
@@ -11920,7 +11932,7 @@
         <p:spPr>
           <a:xfrm>
             <a:off x="640080" y="1965960"/>
-            <a:ext cx="10911535" cy="1737360"/>
+            <a:ext cx="10911535" cy="3657600"/>
           </a:xfrm>
           <a:prstGeom prst="roundRect">
             <a:avLst>
@@ -11951,7 +11963,7 @@
         <p:spPr>
           <a:xfrm>
             <a:off x="868680" y="2103120"/>
-            <a:ext cx="10454335" cy="274320"/>
+            <a:ext cx="10454335" cy="400000"/>
           </a:xfrm>
           <a:prstGeom prst="rect">
             <a:avLst/>
@@ -11967,7 +11979,7 @@
               <a:buNone/>
             </a:pPr>
             <a:r>
-              <a:rPr lang="en-US" sz="1000" b="1" spc="200" kern="0" dirty="0">
+              <a:rPr lang="en-US" sz="1800" b="1" spc="200" kern="0" dirty="0">
                 <a:solidFill>
                   <a:srgbClr val="8A3A12"/>
                 </a:solidFill>
@@ -11977,7 +11989,7 @@
               </a:rPr>
               <a:t>WARNING</a:t>
             </a:r>
-            <a:endParaRPr lang="en-US" sz="1000" dirty="0"/>
+            <a:endParaRPr lang="en-US" sz="1800" dirty="0"/>
           </a:p>
         </p:txBody>
       </p:sp>
@@ -11989,24 +12001,24 @@
         </p:nvSpPr>
         <p:spPr>
           <a:xfrm>
-            <a:off x="868680" y="2404872"/>
-            <a:ext cx="10454335" cy="1143000"/>
-          </a:xfrm>
-          <a:prstGeom prst="rect">
-            <a:avLst/>
-          </a:prstGeom>
-          <a:noFill/>
-          <a:ln/>
-        </p:spPr>
-        <p:txBody>
-          <a:bodyPr wrap="square" lIns="0" tIns="0" rIns="0" bIns="0" rtlCol="0" anchor="t"/>
+            <a:off x="868680" y="2795960"/>
+            <a:ext cx="10454335" cy="2500000"/>
+          </a:xfrm>
+          <a:prstGeom prst="rect">
+            <a:avLst/>
+          </a:prstGeom>
+          <a:noFill/>
+          <a:ln/>
+        </p:spPr>
+        <p:txBody>
+          <a:bodyPr wrap="square" lIns="0" tIns="0" rIns="0" bIns="0" rtlCol="0" anchor="ctr"/>
           <a:lstStyle/>
           <a:p>
             <a:pPr indent="0" marL="0">
               <a:buNone/>
             </a:pPr>
             <a:r>
-              <a:rPr lang="en-US" sz="1250" dirty="0">
+              <a:rPr lang="en-US" sz="2800" dirty="0">
                 <a:solidFill>
                   <a:srgbClr val="26262F"/>
                 </a:solidFill>
@@ -12016,7 +12028,7 @@
               </a:rPr>
               <a:t>Free tiers on platforms like Render often "spin down" your backend after inactivity to save resources, then take a few seconds to "wake up" on the next request. Normal for a student project — paid tiers keep your service running continuously.</a:t>
             </a:r>
-            <a:endParaRPr lang="en-US" sz="1250" dirty="0"/>
+            <a:endParaRPr lang="en-US" sz="2800" dirty="0"/>
           </a:p>
         </p:txBody>
       </p:sp>
@@ -13859,7 +13871,7 @@
         <p:spPr>
           <a:xfrm>
             <a:off x="640080" y="1965960"/>
-            <a:ext cx="10911535" cy="1645920"/>
+            <a:ext cx="10911535" cy="3657600"/>
           </a:xfrm>
           <a:prstGeom prst="roundRect">
             <a:avLst>
@@ -13890,7 +13902,7 @@
         <p:spPr>
           <a:xfrm>
             <a:off x="868680" y="2103120"/>
-            <a:ext cx="10454335" cy="274320"/>
+            <a:ext cx="10454335" cy="400000"/>
           </a:xfrm>
           <a:prstGeom prst="rect">
             <a:avLst/>
@@ -13906,7 +13918,7 @@
               <a:buNone/>
             </a:pPr>
             <a:r>
-              <a:rPr lang="en-US" sz="1000" b="1" spc="200" kern="0" dirty="0">
+              <a:rPr lang="en-US" sz="1800" b="1" spc="200" kern="0" dirty="0">
                 <a:solidFill>
                   <a:srgbClr val="1F7A46"/>
                 </a:solidFill>
@@ -13916,7 +13928,7 @@
               </a:rPr>
               <a:t>TIP</a:t>
             </a:r>
-            <a:endParaRPr lang="en-US" sz="1000" dirty="0"/>
+            <a:endParaRPr lang="en-US" sz="1800" dirty="0"/>
           </a:p>
         </p:txBody>
       </p:sp>
@@ -13928,24 +13940,24 @@
         </p:nvSpPr>
         <p:spPr>
           <a:xfrm>
-            <a:off x="868680" y="2404872"/>
-            <a:ext cx="10454335" cy="1051560"/>
-          </a:xfrm>
-          <a:prstGeom prst="rect">
-            <a:avLst/>
-          </a:prstGeom>
-          <a:noFill/>
-          <a:ln/>
-        </p:spPr>
-        <p:txBody>
-          <a:bodyPr wrap="square" lIns="0" tIns="0" rIns="0" bIns="0" rtlCol="0" anchor="t"/>
+            <a:off x="868680" y="2795960"/>
+            <a:ext cx="10454335" cy="2500000"/>
+          </a:xfrm>
+          <a:prstGeom prst="rect">
+            <a:avLst/>
+          </a:prstGeom>
+          <a:noFill/>
+          <a:ln/>
+        </p:spPr>
+        <p:txBody>
+          <a:bodyPr wrap="square" lIns="0" tIns="0" rIns="0" bIns="0" rtlCol="0" anchor="ctr"/>
           <a:lstStyle/>
           <a:p>
             <a:pPr indent="0" marL="0">
               <a:buNone/>
             </a:pPr>
             <a:r>
-              <a:rPr lang="en-US" sz="1250" dirty="0">
+              <a:rPr lang="en-US" sz="2800" dirty="0">
                 <a:solidFill>
                   <a:srgbClr val="26262F"/>
                 </a:solidFill>
@@ -13955,7 +13967,7 @@
               </a:rPr>
               <a:t>Even for a class project, check your hosting platform's logs dashboard right after deploying, and again the next day. It's the fastest way to catch a crash, a missing environment variable, or a database connection issue that isn't obvious from clicking around the live site.</a:t>
             </a:r>
-            <a:endParaRPr lang="en-US" sz="1250" dirty="0"/>
+            <a:endParaRPr lang="en-US" sz="2800" dirty="0"/>
           </a:p>
         </p:txBody>
       </p:sp>
@@ -15804,7 +15816,7 @@
         <p:spPr>
           <a:xfrm>
             <a:off x="640080" y="1965960"/>
-            <a:ext cx="10911535" cy="1737360"/>
+            <a:ext cx="10911535" cy="3657600"/>
           </a:xfrm>
           <a:prstGeom prst="roundRect">
             <a:avLst>
@@ -15835,7 +15847,7 @@
         <p:spPr>
           <a:xfrm>
             <a:off x="868680" y="2103120"/>
-            <a:ext cx="10454335" cy="274320"/>
+            <a:ext cx="10454335" cy="400000"/>
           </a:xfrm>
           <a:prstGeom prst="rect">
             <a:avLst/>
@@ -15851,7 +15863,7 @@
               <a:buNone/>
             </a:pPr>
             <a:r>
-              <a:rPr lang="en-US" sz="1000" b="1" spc="200" kern="0" dirty="0">
+              <a:rPr lang="en-US" sz="1800" b="1" spc="200" kern="0" dirty="0">
                 <a:solidFill>
                   <a:srgbClr val="33459E"/>
                 </a:solidFill>
@@ -15861,7 +15873,7 @@
               </a:rPr>
               <a:t>NOTE</a:t>
             </a:r>
-            <a:endParaRPr lang="en-US" sz="1000" dirty="0"/>
+            <a:endParaRPr lang="en-US" sz="1800" dirty="0"/>
           </a:p>
         </p:txBody>
       </p:sp>
@@ -15873,24 +15885,24 @@
         </p:nvSpPr>
         <p:spPr>
           <a:xfrm>
-            <a:off x="868680" y="2404872"/>
-            <a:ext cx="10454335" cy="1143000"/>
-          </a:xfrm>
-          <a:prstGeom prst="rect">
-            <a:avLst/>
-          </a:prstGeom>
-          <a:noFill/>
-          <a:ln/>
-        </p:spPr>
-        <p:txBody>
-          <a:bodyPr wrap="square" lIns="0" tIns="0" rIns="0" bIns="0" rtlCol="0" anchor="t"/>
+            <a:off x="868680" y="2795960"/>
+            <a:ext cx="10454335" cy="2500000"/>
+          </a:xfrm>
+          <a:prstGeom prst="rect">
+            <a:avLst/>
+          </a:prstGeom>
+          <a:noFill/>
+          <a:ln/>
+        </p:spPr>
+        <p:txBody>
+          <a:bodyPr wrap="square" lIns="0" tIns="0" rIns="0" bIns="0" rtlCol="0" anchor="ctr"/>
           <a:lstStyle/>
           <a:p>
             <a:pPr indent="0" marL="0">
               <a:buNone/>
             </a:pPr>
             <a:r>
-              <a:rPr lang="en-US" sz="1250" dirty="0">
+              <a:rPr lang="en-US" sz="2800" dirty="0">
                 <a:solidFill>
                   <a:srgbClr val="26262F"/>
                 </a:solidFill>
@@ -15900,7 +15912,7 @@
               </a:rPr>
               <a:t>A very common beginner confusion: buying a domain does not, by itself, put a website online. You still need a server somewhere to store and run your application, and you need to tell your domain where that server is — which is exactly what DNS does.</a:t>
             </a:r>
-            <a:endParaRPr lang="en-US" sz="1250" dirty="0"/>
+            <a:endParaRPr lang="en-US" sz="2800" dirty="0"/>
           </a:p>
         </p:txBody>
       </p:sp>
@@ -17945,7 +17957,7 @@
         <p:spPr>
           <a:xfrm>
             <a:off x="640080" y="1965960"/>
-            <a:ext cx="10911535" cy="1828800"/>
+            <a:ext cx="10911535" cy="3657600"/>
           </a:xfrm>
           <a:prstGeom prst="roundRect">
             <a:avLst>
@@ -17976,7 +17988,7 @@
         <p:spPr>
           <a:xfrm>
             <a:off x="868680" y="2103120"/>
-            <a:ext cx="10454335" cy="274320"/>
+            <a:ext cx="10454335" cy="400000"/>
           </a:xfrm>
           <a:prstGeom prst="rect">
             <a:avLst/>
@@ -17992,7 +18004,7 @@
               <a:buNone/>
             </a:pPr>
             <a:r>
-              <a:rPr lang="en-US" sz="1000" b="1" spc="200" kern="0" dirty="0">
+              <a:rPr lang="en-US" sz="1800" b="1" spc="200" kern="0" dirty="0">
                 <a:solidFill>
                   <a:srgbClr val="1F7A46"/>
                 </a:solidFill>
@@ -18002,7 +18014,7 @@
               </a:rPr>
               <a:t>TIP</a:t>
             </a:r>
-            <a:endParaRPr lang="en-US" sz="1000" dirty="0"/>
+            <a:endParaRPr lang="en-US" sz="1800" dirty="0"/>
           </a:p>
         </p:txBody>
       </p:sp>
@@ -18014,24 +18026,24 @@
         </p:nvSpPr>
         <p:spPr>
           <a:xfrm>
-            <a:off x="868680" y="2404872"/>
-            <a:ext cx="10454335" cy="1234440"/>
-          </a:xfrm>
-          <a:prstGeom prst="rect">
-            <a:avLst/>
-          </a:prstGeom>
-          <a:noFill/>
-          <a:ln/>
-        </p:spPr>
-        <p:txBody>
-          <a:bodyPr wrap="square" lIns="0" tIns="0" rIns="0" bIns="0" rtlCol="0" anchor="t"/>
+            <a:off x="868680" y="2795960"/>
+            <a:ext cx="10454335" cy="2500000"/>
+          </a:xfrm>
+          <a:prstGeom prst="rect">
+            <a:avLst/>
+          </a:prstGeom>
+          <a:noFill/>
+          <a:ln/>
+        </p:spPr>
+        <p:txBody>
+          <a:bodyPr wrap="square" lIns="0" tIns="0" rIns="0" bIns="0" rtlCol="0" anchor="ctr"/>
           <a:lstStyle/>
           <a:p>
             <a:pPr indent="0" marL="0">
               <a:buNone/>
             </a:pPr>
             <a:r>
-              <a:rPr lang="en-US" sz="1250" dirty="0">
+              <a:rPr lang="en-US" sz="2800" dirty="0">
                 <a:solidFill>
                   <a:srgbClr val="26262F"/>
                 </a:solidFill>
@@ -18041,7 +18053,7 @@
               </a:rPr>
               <a:t>Hosting platforms like Vercel/Netlify often ask you to point a subdomain at THEIR domain via CNAME, since their own IPs can change. But you generally can't put a CNAME on the bare root domain alongside records like MX — a historical DNS rule. Most platforms offer a workaround ("ALIAS"/"ANAME" records) for pointing a root domain at them.</a:t>
             </a:r>
-            <a:endParaRPr lang="en-US" sz="1250" dirty="0"/>
+            <a:endParaRPr lang="en-US" sz="2800" dirty="0"/>
           </a:p>
         </p:txBody>
       </p:sp>
